--- a/프레젠테이션12.pptx
+++ b/프레젠테이션12.pptx
@@ -9,6 +9,8 @@
     <p:sldId id="257" r:id="rId3"/>
     <p:sldId id="258" r:id="rId4"/>
     <p:sldId id="259" r:id="rId5"/>
+    <p:sldId id="260" r:id="rId6"/>
+    <p:sldId id="261" r:id="rId7"/>
   </p:sldIdLst>
   <p:sldSz cx="12192000" cy="6858000"/>
   <p:notesSz cx="6858000" cy="9144000"/>
@@ -262,7 +264,7 @@
           <a:p>
             <a:fld id="{A9B323CC-91F9-4676-9123-0A1E04F7520C}" type="datetimeFigureOut">
               <a:rPr lang="ko-KR" altLang="en-US" smtClean="0"/>
-              <a:t>2026-06-16</a:t>
+              <a:t>2026-06-18</a:t>
             </a:fld>
             <a:endParaRPr lang="ko-KR" altLang="en-US"/>
           </a:p>
@@ -460,7 +462,7 @@
           <a:p>
             <a:fld id="{A9B323CC-91F9-4676-9123-0A1E04F7520C}" type="datetimeFigureOut">
               <a:rPr lang="ko-KR" altLang="en-US" smtClean="0"/>
-              <a:t>2026-06-16</a:t>
+              <a:t>2026-06-18</a:t>
             </a:fld>
             <a:endParaRPr lang="ko-KR" altLang="en-US"/>
           </a:p>
@@ -668,7 +670,7 @@
           <a:p>
             <a:fld id="{A9B323CC-91F9-4676-9123-0A1E04F7520C}" type="datetimeFigureOut">
               <a:rPr lang="ko-KR" altLang="en-US" smtClean="0"/>
-              <a:t>2026-06-16</a:t>
+              <a:t>2026-06-18</a:t>
             </a:fld>
             <a:endParaRPr lang="ko-KR" altLang="en-US"/>
           </a:p>
@@ -866,7 +868,7 @@
           <a:p>
             <a:fld id="{A9B323CC-91F9-4676-9123-0A1E04F7520C}" type="datetimeFigureOut">
               <a:rPr lang="ko-KR" altLang="en-US" smtClean="0"/>
-              <a:t>2026-06-16</a:t>
+              <a:t>2026-06-18</a:t>
             </a:fld>
             <a:endParaRPr lang="ko-KR" altLang="en-US"/>
           </a:p>
@@ -1141,7 +1143,7 @@
           <a:p>
             <a:fld id="{A9B323CC-91F9-4676-9123-0A1E04F7520C}" type="datetimeFigureOut">
               <a:rPr lang="ko-KR" altLang="en-US" smtClean="0"/>
-              <a:t>2026-06-16</a:t>
+              <a:t>2026-06-18</a:t>
             </a:fld>
             <a:endParaRPr lang="ko-KR" altLang="en-US"/>
           </a:p>
@@ -1406,7 +1408,7 @@
           <a:p>
             <a:fld id="{A9B323CC-91F9-4676-9123-0A1E04F7520C}" type="datetimeFigureOut">
               <a:rPr lang="ko-KR" altLang="en-US" smtClean="0"/>
-              <a:t>2026-06-16</a:t>
+              <a:t>2026-06-18</a:t>
             </a:fld>
             <a:endParaRPr lang="ko-KR" altLang="en-US"/>
           </a:p>
@@ -1818,7 +1820,7 @@
           <a:p>
             <a:fld id="{A9B323CC-91F9-4676-9123-0A1E04F7520C}" type="datetimeFigureOut">
               <a:rPr lang="ko-KR" altLang="en-US" smtClean="0"/>
-              <a:t>2026-06-16</a:t>
+              <a:t>2026-06-18</a:t>
             </a:fld>
             <a:endParaRPr lang="ko-KR" altLang="en-US"/>
           </a:p>
@@ -1959,7 +1961,7 @@
           <a:p>
             <a:fld id="{A9B323CC-91F9-4676-9123-0A1E04F7520C}" type="datetimeFigureOut">
               <a:rPr lang="ko-KR" altLang="en-US" smtClean="0"/>
-              <a:t>2026-06-16</a:t>
+              <a:t>2026-06-18</a:t>
             </a:fld>
             <a:endParaRPr lang="ko-KR" altLang="en-US"/>
           </a:p>
@@ -2072,7 +2074,7 @@
           <a:p>
             <a:fld id="{A9B323CC-91F9-4676-9123-0A1E04F7520C}" type="datetimeFigureOut">
               <a:rPr lang="ko-KR" altLang="en-US" smtClean="0"/>
-              <a:t>2026-06-16</a:t>
+              <a:t>2026-06-18</a:t>
             </a:fld>
             <a:endParaRPr lang="ko-KR" altLang="en-US"/>
           </a:p>
@@ -2383,7 +2385,7 @@
           <a:p>
             <a:fld id="{A9B323CC-91F9-4676-9123-0A1E04F7520C}" type="datetimeFigureOut">
               <a:rPr lang="ko-KR" altLang="en-US" smtClean="0"/>
-              <a:t>2026-06-16</a:t>
+              <a:t>2026-06-18</a:t>
             </a:fld>
             <a:endParaRPr lang="ko-KR" altLang="en-US"/>
           </a:p>
@@ -2671,7 +2673,7 @@
           <a:p>
             <a:fld id="{A9B323CC-91F9-4676-9123-0A1E04F7520C}" type="datetimeFigureOut">
               <a:rPr lang="ko-KR" altLang="en-US" smtClean="0"/>
-              <a:t>2026-06-16</a:t>
+              <a:t>2026-06-18</a:t>
             </a:fld>
             <a:endParaRPr lang="ko-KR" altLang="en-US"/>
           </a:p>
@@ -2912,7 +2914,7 @@
           <a:p>
             <a:fld id="{A9B323CC-91F9-4676-9123-0A1E04F7520C}" type="datetimeFigureOut">
               <a:rPr lang="ko-KR" altLang="en-US" smtClean="0"/>
-              <a:t>2026-06-16</a:t>
+              <a:t>2026-06-18</a:t>
             </a:fld>
             <a:endParaRPr lang="ko-KR" altLang="en-US"/>
           </a:p>
@@ -4528,6 +4530,214 @@
 </p:sld>
 </file>
 
+<file path=ppt/slides/slide5.xml><?xml version="1.0" encoding="utf-8"?>
+<p:sld xmlns:a="http://schemas.openxmlformats.org/drawingml/2006/main" xmlns:r="http://schemas.openxmlformats.org/officeDocument/2006/relationships" xmlns:p="http://schemas.openxmlformats.org/presentationml/2006/main">
+  <p:cSld>
+    <p:spTree>
+      <p:nvGrpSpPr>
+        <p:cNvPr id="1" name=""/>
+        <p:cNvGrpSpPr/>
+        <p:nvPr/>
+      </p:nvGrpSpPr>
+      <p:grpSpPr>
+        <a:xfrm>
+          <a:off x="0" y="0"/>
+          <a:ext cx="0" cy="0"/>
+          <a:chOff x="0" y="0"/>
+          <a:chExt cx="0" cy="0"/>
+        </a:xfrm>
+      </p:grpSpPr>
+      <p:pic>
+        <p:nvPicPr>
+          <p:cNvPr id="5" name="그림 4">
+            <a:extLst>
+              <a:ext uri="{FF2B5EF4-FFF2-40B4-BE49-F238E27FC236}">
+                <a16:creationId xmlns:a16="http://schemas.microsoft.com/office/drawing/2014/main" id="{836BD3E7-FFFD-4106-9E12-307FA371A10A}"/>
+              </a:ext>
+            </a:extLst>
+          </p:cNvPr>
+          <p:cNvPicPr>
+            <a:picLocks noChangeAspect="1"/>
+          </p:cNvPicPr>
+          <p:nvPr/>
+        </p:nvPicPr>
+        <p:blipFill>
+          <a:blip r:embed="rId2"/>
+          <a:stretch>
+            <a:fillRect/>
+          </a:stretch>
+        </p:blipFill>
+        <p:spPr>
+          <a:xfrm rot="16200000">
+            <a:off x="942623" y="-641106"/>
+            <a:ext cx="7162014" cy="6858000"/>
+          </a:xfrm>
+          <a:prstGeom prst="rect">
+            <a:avLst/>
+          </a:prstGeom>
+        </p:spPr>
+      </p:pic>
+      <p:pic>
+        <p:nvPicPr>
+          <p:cNvPr id="10" name="그림 9">
+            <a:extLst>
+              <a:ext uri="{FF2B5EF4-FFF2-40B4-BE49-F238E27FC236}">
+                <a16:creationId xmlns:a16="http://schemas.microsoft.com/office/drawing/2014/main" id="{964B5439-DBFE-4C7F-A5BC-006B8556FCA7}"/>
+              </a:ext>
+            </a:extLst>
+          </p:cNvPr>
+          <p:cNvPicPr>
+            <a:picLocks noChangeAspect="1"/>
+          </p:cNvPicPr>
+          <p:nvPr/>
+        </p:nvPicPr>
+        <p:blipFill>
+          <a:blip r:embed="rId3"/>
+          <a:stretch>
+            <a:fillRect/>
+          </a:stretch>
+        </p:blipFill>
+        <p:spPr>
+          <a:xfrm>
+            <a:off x="1849462" y="0"/>
+            <a:ext cx="8493076" cy="6858000"/>
+          </a:xfrm>
+          <a:prstGeom prst="rect">
+            <a:avLst/>
+          </a:prstGeom>
+        </p:spPr>
+      </p:pic>
+    </p:spTree>
+    <p:extLst>
+      <p:ext uri="{BB962C8B-B14F-4D97-AF65-F5344CB8AC3E}">
+        <p14:creationId xmlns:p14="http://schemas.microsoft.com/office/powerpoint/2010/main" val="1714139045"/>
+      </p:ext>
+    </p:extLst>
+  </p:cSld>
+  <p:clrMapOvr>
+    <a:masterClrMapping/>
+  </p:clrMapOvr>
+</p:sld>
+</file>
+
+<file path=ppt/slides/slide6.xml><?xml version="1.0" encoding="utf-8"?>
+<p:sld xmlns:a="http://schemas.openxmlformats.org/drawingml/2006/main" xmlns:r="http://schemas.openxmlformats.org/officeDocument/2006/relationships" xmlns:p="http://schemas.openxmlformats.org/presentationml/2006/main">
+  <p:cSld>
+    <p:spTree>
+      <p:nvGrpSpPr>
+        <p:cNvPr id="1" name=""/>
+        <p:cNvGrpSpPr/>
+        <p:nvPr/>
+      </p:nvGrpSpPr>
+      <p:grpSpPr>
+        <a:xfrm>
+          <a:off x="0" y="0"/>
+          <a:ext cx="0" cy="0"/>
+          <a:chOff x="0" y="0"/>
+          <a:chExt cx="0" cy="0"/>
+        </a:xfrm>
+      </p:grpSpPr>
+      <p:pic>
+        <p:nvPicPr>
+          <p:cNvPr id="5" name="그림 4">
+            <a:extLst>
+              <a:ext uri="{FF2B5EF4-FFF2-40B4-BE49-F238E27FC236}">
+                <a16:creationId xmlns:a16="http://schemas.microsoft.com/office/drawing/2014/main" id="{AFA88517-EC79-49AC-85E7-F62ACF514866}"/>
+              </a:ext>
+            </a:extLst>
+          </p:cNvPr>
+          <p:cNvPicPr>
+            <a:picLocks noChangeAspect="1"/>
+          </p:cNvPicPr>
+          <p:nvPr/>
+        </p:nvPicPr>
+        <p:blipFill>
+          <a:blip r:embed="rId2"/>
+          <a:stretch>
+            <a:fillRect/>
+          </a:stretch>
+        </p:blipFill>
+        <p:spPr>
+          <a:xfrm>
+            <a:off x="8347" y="-2836190"/>
+            <a:ext cx="12183653" cy="6858000"/>
+          </a:xfrm>
+          <a:prstGeom prst="rect">
+            <a:avLst/>
+          </a:prstGeom>
+        </p:spPr>
+      </p:pic>
+      <p:pic>
+        <p:nvPicPr>
+          <p:cNvPr id="9" name="그림 8">
+            <a:extLst>
+              <a:ext uri="{FF2B5EF4-FFF2-40B4-BE49-F238E27FC236}">
+                <a16:creationId xmlns:a16="http://schemas.microsoft.com/office/drawing/2014/main" id="{4D17B09A-DBE4-43D6-8529-E0FBF981A506}"/>
+              </a:ext>
+            </a:extLst>
+          </p:cNvPr>
+          <p:cNvPicPr>
+            <a:picLocks noChangeAspect="1"/>
+          </p:cNvPicPr>
+          <p:nvPr/>
+        </p:nvPicPr>
+        <p:blipFill rotWithShape="1">
+          <a:blip r:embed="rId3"/>
+          <a:srcRect t="1" b="23749"/>
+          <a:stretch/>
+        </p:blipFill>
+        <p:spPr>
+          <a:xfrm>
+            <a:off x="39343" y="3994689"/>
+            <a:ext cx="12192000" cy="3041542"/>
+          </a:xfrm>
+          <a:prstGeom prst="rect">
+            <a:avLst/>
+          </a:prstGeom>
+        </p:spPr>
+      </p:pic>
+      <p:pic>
+        <p:nvPicPr>
+          <p:cNvPr id="12" name="그림 11">
+            <a:extLst>
+              <a:ext uri="{FF2B5EF4-FFF2-40B4-BE49-F238E27FC236}">
+                <a16:creationId xmlns:a16="http://schemas.microsoft.com/office/drawing/2014/main" id="{E8399801-D94B-470D-83FD-017BF8D7E058}"/>
+              </a:ext>
+            </a:extLst>
+          </p:cNvPr>
+          <p:cNvPicPr>
+            <a:picLocks noChangeAspect="1"/>
+          </p:cNvPicPr>
+          <p:nvPr/>
+        </p:nvPicPr>
+        <p:blipFill rotWithShape="1">
+          <a:blip r:embed="rId3"/>
+          <a:srcRect l="16684" t="80589" r="40556" b="3869"/>
+          <a:stretch/>
+        </p:blipFill>
+        <p:spPr>
+          <a:xfrm>
+            <a:off x="39343" y="-1675238"/>
+            <a:ext cx="5592305" cy="665006"/>
+          </a:xfrm>
+          <a:prstGeom prst="rect">
+            <a:avLst/>
+          </a:prstGeom>
+        </p:spPr>
+      </p:pic>
+    </p:spTree>
+    <p:extLst>
+      <p:ext uri="{BB962C8B-B14F-4D97-AF65-F5344CB8AC3E}">
+        <p14:creationId xmlns:p14="http://schemas.microsoft.com/office/powerpoint/2010/main" val="1400896831"/>
+      </p:ext>
+    </p:extLst>
+  </p:cSld>
+  <p:clrMapOvr>
+    <a:masterClrMapping/>
+  </p:clrMapOvr>
+</p:sld>
+</file>
+
 <file path=ppt/theme/theme1.xml><?xml version="1.0" encoding="utf-8"?>
 <a:theme xmlns:a="http://schemas.openxmlformats.org/drawingml/2006/main" name="Office 테마">
   <a:themeElements>

--- a/프레젠테이션12.pptx
+++ b/프레젠테이션12.pptx
@@ -264,7 +264,7 @@
           <a:p>
             <a:fld id="{A9B323CC-91F9-4676-9123-0A1E04F7520C}" type="datetimeFigureOut">
               <a:rPr lang="ko-KR" altLang="en-US" smtClean="0"/>
-              <a:t>2026-06-18</a:t>
+              <a:t>2026-06-19</a:t>
             </a:fld>
             <a:endParaRPr lang="ko-KR" altLang="en-US"/>
           </a:p>
@@ -462,7 +462,7 @@
           <a:p>
             <a:fld id="{A9B323CC-91F9-4676-9123-0A1E04F7520C}" type="datetimeFigureOut">
               <a:rPr lang="ko-KR" altLang="en-US" smtClean="0"/>
-              <a:t>2026-06-18</a:t>
+              <a:t>2026-06-19</a:t>
             </a:fld>
             <a:endParaRPr lang="ko-KR" altLang="en-US"/>
           </a:p>
@@ -670,7 +670,7 @@
           <a:p>
             <a:fld id="{A9B323CC-91F9-4676-9123-0A1E04F7520C}" type="datetimeFigureOut">
               <a:rPr lang="ko-KR" altLang="en-US" smtClean="0"/>
-              <a:t>2026-06-18</a:t>
+              <a:t>2026-06-19</a:t>
             </a:fld>
             <a:endParaRPr lang="ko-KR" altLang="en-US"/>
           </a:p>
@@ -868,7 +868,7 @@
           <a:p>
             <a:fld id="{A9B323CC-91F9-4676-9123-0A1E04F7520C}" type="datetimeFigureOut">
               <a:rPr lang="ko-KR" altLang="en-US" smtClean="0"/>
-              <a:t>2026-06-18</a:t>
+              <a:t>2026-06-19</a:t>
             </a:fld>
             <a:endParaRPr lang="ko-KR" altLang="en-US"/>
           </a:p>
@@ -1143,7 +1143,7 @@
           <a:p>
             <a:fld id="{A9B323CC-91F9-4676-9123-0A1E04F7520C}" type="datetimeFigureOut">
               <a:rPr lang="ko-KR" altLang="en-US" smtClean="0"/>
-              <a:t>2026-06-18</a:t>
+              <a:t>2026-06-19</a:t>
             </a:fld>
             <a:endParaRPr lang="ko-KR" altLang="en-US"/>
           </a:p>
@@ -1408,7 +1408,7 @@
           <a:p>
             <a:fld id="{A9B323CC-91F9-4676-9123-0A1E04F7520C}" type="datetimeFigureOut">
               <a:rPr lang="ko-KR" altLang="en-US" smtClean="0"/>
-              <a:t>2026-06-18</a:t>
+              <a:t>2026-06-19</a:t>
             </a:fld>
             <a:endParaRPr lang="ko-KR" altLang="en-US"/>
           </a:p>
@@ -1820,7 +1820,7 @@
           <a:p>
             <a:fld id="{A9B323CC-91F9-4676-9123-0A1E04F7520C}" type="datetimeFigureOut">
               <a:rPr lang="ko-KR" altLang="en-US" smtClean="0"/>
-              <a:t>2026-06-18</a:t>
+              <a:t>2026-06-19</a:t>
             </a:fld>
             <a:endParaRPr lang="ko-KR" altLang="en-US"/>
           </a:p>
@@ -1961,7 +1961,7 @@
           <a:p>
             <a:fld id="{A9B323CC-91F9-4676-9123-0A1E04F7520C}" type="datetimeFigureOut">
               <a:rPr lang="ko-KR" altLang="en-US" smtClean="0"/>
-              <a:t>2026-06-18</a:t>
+              <a:t>2026-06-19</a:t>
             </a:fld>
             <a:endParaRPr lang="ko-KR" altLang="en-US"/>
           </a:p>
@@ -2074,7 +2074,7 @@
           <a:p>
             <a:fld id="{A9B323CC-91F9-4676-9123-0A1E04F7520C}" type="datetimeFigureOut">
               <a:rPr lang="ko-KR" altLang="en-US" smtClean="0"/>
-              <a:t>2026-06-18</a:t>
+              <a:t>2026-06-19</a:t>
             </a:fld>
             <a:endParaRPr lang="ko-KR" altLang="en-US"/>
           </a:p>
@@ -2385,7 +2385,7 @@
           <a:p>
             <a:fld id="{A9B323CC-91F9-4676-9123-0A1E04F7520C}" type="datetimeFigureOut">
               <a:rPr lang="ko-KR" altLang="en-US" smtClean="0"/>
-              <a:t>2026-06-18</a:t>
+              <a:t>2026-06-19</a:t>
             </a:fld>
             <a:endParaRPr lang="ko-KR" altLang="en-US"/>
           </a:p>
@@ -2673,7 +2673,7 @@
           <a:p>
             <a:fld id="{A9B323CC-91F9-4676-9123-0A1E04F7520C}" type="datetimeFigureOut">
               <a:rPr lang="ko-KR" altLang="en-US" smtClean="0"/>
-              <a:t>2026-06-18</a:t>
+              <a:t>2026-06-19</a:t>
             </a:fld>
             <a:endParaRPr lang="ko-KR" altLang="en-US"/>
           </a:p>
@@ -2914,7 +2914,7 @@
           <a:p>
             <a:fld id="{A9B323CC-91F9-4676-9123-0A1E04F7520C}" type="datetimeFigureOut">
               <a:rPr lang="ko-KR" altLang="en-US" smtClean="0"/>
-              <a:t>2026-06-18</a:t>
+              <a:t>2026-06-19</a:t>
             </a:fld>
             <a:endParaRPr lang="ko-KR" altLang="en-US"/>
           </a:p>

--- a/프레젠테이션12.pptx
+++ b/프레젠테이션12.pptx
@@ -8,9 +8,13 @@
     <p:sldId id="256" r:id="rId2"/>
     <p:sldId id="257" r:id="rId3"/>
     <p:sldId id="258" r:id="rId4"/>
-    <p:sldId id="259" r:id="rId5"/>
-    <p:sldId id="260" r:id="rId6"/>
-    <p:sldId id="261" r:id="rId7"/>
+    <p:sldId id="264" r:id="rId5"/>
+    <p:sldId id="259" r:id="rId6"/>
+    <p:sldId id="260" r:id="rId7"/>
+    <p:sldId id="261" r:id="rId8"/>
+    <p:sldId id="262" r:id="rId9"/>
+    <p:sldId id="263" r:id="rId10"/>
+    <p:sldId id="265" r:id="rId11"/>
   </p:sldIdLst>
   <p:sldSz cx="12192000" cy="6858000"/>
   <p:notesSz cx="6858000" cy="9144000"/>
@@ -264,7 +268,7 @@
           <a:p>
             <a:fld id="{A9B323CC-91F9-4676-9123-0A1E04F7520C}" type="datetimeFigureOut">
               <a:rPr lang="ko-KR" altLang="en-US" smtClean="0"/>
-              <a:t>2026-06-19</a:t>
+              <a:t>2026-06-20</a:t>
             </a:fld>
             <a:endParaRPr lang="ko-KR" altLang="en-US"/>
           </a:p>
@@ -462,7 +466,7 @@
           <a:p>
             <a:fld id="{A9B323CC-91F9-4676-9123-0A1E04F7520C}" type="datetimeFigureOut">
               <a:rPr lang="ko-KR" altLang="en-US" smtClean="0"/>
-              <a:t>2026-06-19</a:t>
+              <a:t>2026-06-20</a:t>
             </a:fld>
             <a:endParaRPr lang="ko-KR" altLang="en-US"/>
           </a:p>
@@ -670,7 +674,7 @@
           <a:p>
             <a:fld id="{A9B323CC-91F9-4676-9123-0A1E04F7520C}" type="datetimeFigureOut">
               <a:rPr lang="ko-KR" altLang="en-US" smtClean="0"/>
-              <a:t>2026-06-19</a:t>
+              <a:t>2026-06-20</a:t>
             </a:fld>
             <a:endParaRPr lang="ko-KR" altLang="en-US"/>
           </a:p>
@@ -868,7 +872,7 @@
           <a:p>
             <a:fld id="{A9B323CC-91F9-4676-9123-0A1E04F7520C}" type="datetimeFigureOut">
               <a:rPr lang="ko-KR" altLang="en-US" smtClean="0"/>
-              <a:t>2026-06-19</a:t>
+              <a:t>2026-06-20</a:t>
             </a:fld>
             <a:endParaRPr lang="ko-KR" altLang="en-US"/>
           </a:p>
@@ -1143,7 +1147,7 @@
           <a:p>
             <a:fld id="{A9B323CC-91F9-4676-9123-0A1E04F7520C}" type="datetimeFigureOut">
               <a:rPr lang="ko-KR" altLang="en-US" smtClean="0"/>
-              <a:t>2026-06-19</a:t>
+              <a:t>2026-06-20</a:t>
             </a:fld>
             <a:endParaRPr lang="ko-KR" altLang="en-US"/>
           </a:p>
@@ -1408,7 +1412,7 @@
           <a:p>
             <a:fld id="{A9B323CC-91F9-4676-9123-0A1E04F7520C}" type="datetimeFigureOut">
               <a:rPr lang="ko-KR" altLang="en-US" smtClean="0"/>
-              <a:t>2026-06-19</a:t>
+              <a:t>2026-06-20</a:t>
             </a:fld>
             <a:endParaRPr lang="ko-KR" altLang="en-US"/>
           </a:p>
@@ -1820,7 +1824,7 @@
           <a:p>
             <a:fld id="{A9B323CC-91F9-4676-9123-0A1E04F7520C}" type="datetimeFigureOut">
               <a:rPr lang="ko-KR" altLang="en-US" smtClean="0"/>
-              <a:t>2026-06-19</a:t>
+              <a:t>2026-06-20</a:t>
             </a:fld>
             <a:endParaRPr lang="ko-KR" altLang="en-US"/>
           </a:p>
@@ -1961,7 +1965,7 @@
           <a:p>
             <a:fld id="{A9B323CC-91F9-4676-9123-0A1E04F7520C}" type="datetimeFigureOut">
               <a:rPr lang="ko-KR" altLang="en-US" smtClean="0"/>
-              <a:t>2026-06-19</a:t>
+              <a:t>2026-06-20</a:t>
             </a:fld>
             <a:endParaRPr lang="ko-KR" altLang="en-US"/>
           </a:p>
@@ -2074,7 +2078,7 @@
           <a:p>
             <a:fld id="{A9B323CC-91F9-4676-9123-0A1E04F7520C}" type="datetimeFigureOut">
               <a:rPr lang="ko-KR" altLang="en-US" smtClean="0"/>
-              <a:t>2026-06-19</a:t>
+              <a:t>2026-06-20</a:t>
             </a:fld>
             <a:endParaRPr lang="ko-KR" altLang="en-US"/>
           </a:p>
@@ -2385,7 +2389,7 @@
           <a:p>
             <a:fld id="{A9B323CC-91F9-4676-9123-0A1E04F7520C}" type="datetimeFigureOut">
               <a:rPr lang="ko-KR" altLang="en-US" smtClean="0"/>
-              <a:t>2026-06-19</a:t>
+              <a:t>2026-06-20</a:t>
             </a:fld>
             <a:endParaRPr lang="ko-KR" altLang="en-US"/>
           </a:p>
@@ -2673,7 +2677,7 @@
           <a:p>
             <a:fld id="{A9B323CC-91F9-4676-9123-0A1E04F7520C}" type="datetimeFigureOut">
               <a:rPr lang="ko-KR" altLang="en-US" smtClean="0"/>
-              <a:t>2026-06-19</a:t>
+              <a:t>2026-06-20</a:t>
             </a:fld>
             <a:endParaRPr lang="ko-KR" altLang="en-US"/>
           </a:p>
@@ -2914,7 +2918,7 @@
           <a:p>
             <a:fld id="{A9B323CC-91F9-4676-9123-0A1E04F7520C}" type="datetimeFigureOut">
               <a:rPr lang="ko-KR" altLang="en-US" smtClean="0"/>
-              <a:t>2026-06-19</a:t>
+              <a:t>2026-06-20</a:t>
             </a:fld>
             <a:endParaRPr lang="ko-KR" altLang="en-US"/>
           </a:p>
@@ -3346,9 +3350,9 @@
         <p:grpSpPr>
           <a:xfrm>
             <a:off x="2228035" y="1330150"/>
-            <a:ext cx="6491473" cy="3487178"/>
+            <a:ext cx="7073390" cy="3487178"/>
             <a:chOff x="2217760" y="1360972"/>
-            <a:chExt cx="6491473" cy="3487178"/>
+            <a:chExt cx="7073390" cy="3487178"/>
           </a:xfrm>
         </p:grpSpPr>
         <p:sp>
@@ -3645,8 +3649,8 @@
           </p:nvSpPr>
           <p:spPr>
             <a:xfrm>
-              <a:off x="3674423" y="3504276"/>
-              <a:ext cx="4618572" cy="369332"/>
+              <a:off x="3287583" y="3406445"/>
+              <a:ext cx="6003567" cy="369332"/>
             </a:xfrm>
             <a:prstGeom prst="rect">
               <a:avLst/>
@@ -3660,8 +3664,12 @@
             <a:lstStyle/>
             <a:p>
               <a:r>
+                <a:rPr lang="ko-KR" altLang="en-US"/>
+                <a:t>춥지만 신재생활발                                 </a:t>
+              </a:r>
+              <a:r>
                 <a:rPr lang="ko-KR" altLang="en-US" dirty="0"/>
-                <a:t>추움                                 가스 수요 </a:t>
+                <a:t>가스 수요 </a:t>
               </a:r>
               <a:r>
                 <a:rPr lang="en-US" altLang="ko-KR" dirty="0"/>
@@ -3712,6 +3720,94 @@
     <p:extLst>
       <p:ext uri="{BB962C8B-B14F-4D97-AF65-F5344CB8AC3E}">
         <p14:creationId xmlns:p14="http://schemas.microsoft.com/office/powerpoint/2010/main" val="1385004186"/>
+      </p:ext>
+    </p:extLst>
+  </p:cSld>
+  <p:clrMapOvr>
+    <a:masterClrMapping/>
+  </p:clrMapOvr>
+</p:sld>
+</file>
+
+<file path=ppt/slides/slide10.xml><?xml version="1.0" encoding="utf-8"?>
+<p:sld xmlns:a="http://schemas.openxmlformats.org/drawingml/2006/main" xmlns:r="http://schemas.openxmlformats.org/officeDocument/2006/relationships" xmlns:p="http://schemas.openxmlformats.org/presentationml/2006/main">
+  <p:cSld>
+    <p:spTree>
+      <p:nvGrpSpPr>
+        <p:cNvPr id="1" name=""/>
+        <p:cNvGrpSpPr/>
+        <p:nvPr/>
+      </p:nvGrpSpPr>
+      <p:grpSpPr>
+        <a:xfrm>
+          <a:off x="0" y="0"/>
+          <a:ext cx="0" cy="0"/>
+          <a:chOff x="0" y="0"/>
+          <a:chExt cx="0" cy="0"/>
+        </a:xfrm>
+      </p:grpSpPr>
+      <p:pic>
+        <p:nvPicPr>
+          <p:cNvPr id="5" name="그림 4">
+            <a:extLst>
+              <a:ext uri="{FF2B5EF4-FFF2-40B4-BE49-F238E27FC236}">
+                <a16:creationId xmlns:a16="http://schemas.microsoft.com/office/drawing/2014/main" id="{3012420E-D935-4C6F-BF50-348D71FCFB55}"/>
+              </a:ext>
+            </a:extLst>
+          </p:cNvPr>
+          <p:cNvPicPr>
+            <a:picLocks noChangeAspect="1"/>
+          </p:cNvPicPr>
+          <p:nvPr/>
+        </p:nvPicPr>
+        <p:blipFill rotWithShape="1">
+          <a:blip r:embed="rId2"/>
+          <a:srcRect t="20342"/>
+          <a:stretch/>
+        </p:blipFill>
+        <p:spPr>
+          <a:xfrm>
+            <a:off x="331826" y="1395046"/>
+            <a:ext cx="11528347" cy="5462954"/>
+          </a:xfrm>
+          <a:prstGeom prst="rect">
+            <a:avLst/>
+          </a:prstGeom>
+        </p:spPr>
+      </p:pic>
+      <p:pic>
+        <p:nvPicPr>
+          <p:cNvPr id="6" name="그림 5">
+            <a:extLst>
+              <a:ext uri="{FF2B5EF4-FFF2-40B4-BE49-F238E27FC236}">
+                <a16:creationId xmlns:a16="http://schemas.microsoft.com/office/drawing/2014/main" id="{48671236-F346-4E0E-BC9E-CED39011377A}"/>
+              </a:ext>
+            </a:extLst>
+          </p:cNvPr>
+          <p:cNvPicPr>
+            <a:picLocks noChangeAspect="1"/>
+          </p:cNvPicPr>
+          <p:nvPr/>
+        </p:nvPicPr>
+        <p:blipFill rotWithShape="1">
+          <a:blip r:embed="rId2"/>
+          <a:srcRect l="52847" b="91966"/>
+          <a:stretch/>
+        </p:blipFill>
+        <p:spPr>
+          <a:xfrm>
+            <a:off x="6095999" y="1395046"/>
+            <a:ext cx="5435927" cy="550985"/>
+          </a:xfrm>
+          <a:prstGeom prst="rect">
+            <a:avLst/>
+          </a:prstGeom>
+        </p:spPr>
+      </p:pic>
+    </p:spTree>
+    <p:extLst>
+      <p:ext uri="{BB962C8B-B14F-4D97-AF65-F5344CB8AC3E}">
+        <p14:creationId xmlns:p14="http://schemas.microsoft.com/office/powerpoint/2010/main" val="1757875038"/>
       </p:ext>
     </p:extLst>
   </p:cSld>
@@ -3738,322 +3834,6 @@
           <a:chExt cx="0" cy="0"/>
         </a:xfrm>
       </p:grpSpPr>
-      <p:grpSp>
-        <p:nvGrpSpPr>
-          <p:cNvPr id="7" name="그룹 6">
-            <a:extLst>
-              <a:ext uri="{FF2B5EF4-FFF2-40B4-BE49-F238E27FC236}">
-                <a16:creationId xmlns:a16="http://schemas.microsoft.com/office/drawing/2014/main" id="{C13C49B2-230E-434B-BAB0-D46DBF5D3011}"/>
-              </a:ext>
-            </a:extLst>
-          </p:cNvPr>
-          <p:cNvGrpSpPr/>
-          <p:nvPr/>
-        </p:nvGrpSpPr>
-        <p:grpSpPr>
-          <a:xfrm>
-            <a:off x="3107470" y="4156722"/>
-            <a:ext cx="5229891" cy="573781"/>
-            <a:chOff x="1722845" y="2529015"/>
-            <a:chExt cx="5229891" cy="1375719"/>
-          </a:xfrm>
-        </p:grpSpPr>
-        <p:sp>
-          <p:nvSpPr>
-            <p:cNvPr id="4" name="사각형: 둥근 모서리 3">
-              <a:extLst>
-                <a:ext uri="{FF2B5EF4-FFF2-40B4-BE49-F238E27FC236}">
-                  <a16:creationId xmlns:a16="http://schemas.microsoft.com/office/drawing/2014/main" id="{099D45E3-24AF-41A7-A5F4-8BA6CF0278B5}"/>
-                </a:ext>
-              </a:extLst>
-            </p:cNvPr>
-            <p:cNvSpPr/>
-            <p:nvPr/>
-          </p:nvSpPr>
-          <p:spPr>
-            <a:xfrm>
-              <a:off x="2113005" y="2529015"/>
-              <a:ext cx="4839731" cy="1375719"/>
-            </a:xfrm>
-            <a:prstGeom prst="roundRect">
-              <a:avLst/>
-            </a:prstGeom>
-            <a:solidFill>
-              <a:schemeClr val="bg1"/>
-            </a:solidFill>
-            <a:ln>
-              <a:solidFill>
-                <a:schemeClr val="tx1"/>
-              </a:solidFill>
-            </a:ln>
-          </p:spPr>
-          <p:style>
-            <a:lnRef idx="2">
-              <a:schemeClr val="accent1">
-                <a:shade val="50000"/>
-              </a:schemeClr>
-            </a:lnRef>
-            <a:fillRef idx="1">
-              <a:schemeClr val="accent1"/>
-            </a:fillRef>
-            <a:effectRef idx="0">
-              <a:schemeClr val="accent1"/>
-            </a:effectRef>
-            <a:fontRef idx="minor">
-              <a:schemeClr val="lt1"/>
-            </a:fontRef>
-          </p:style>
-          <p:txBody>
-            <a:bodyPr rtlCol="0" anchor="ctr"/>
-            <a:lstStyle/>
-            <a:p>
-              <a:pPr algn="ctr"/>
-              <a:r>
-                <a:rPr lang="ko-KR" altLang="en-US" dirty="0">
-                  <a:solidFill>
-                    <a:schemeClr val="tx1"/>
-                  </a:solidFill>
-                </a:rPr>
-                <a:t>추운 날이니 가스물량이 </a:t>
-              </a:r>
-              <a:r>
-                <a:rPr lang="ko-KR" altLang="en-US" dirty="0" err="1">
-                  <a:solidFill>
-                    <a:schemeClr val="tx1"/>
-                  </a:solidFill>
-                </a:rPr>
-                <a:t>많겠구만</a:t>
-              </a:r>
-              <a:r>
-                <a:rPr lang="en-US" altLang="ko-KR" dirty="0">
-                  <a:solidFill>
-                    <a:schemeClr val="tx1"/>
-                  </a:solidFill>
-                </a:rPr>
-                <a:t>!</a:t>
-              </a:r>
-              <a:endParaRPr lang="ko-KR" altLang="en-US" dirty="0">
-                <a:solidFill>
-                  <a:schemeClr val="tx1"/>
-                </a:solidFill>
-              </a:endParaRPr>
-            </a:p>
-          </p:txBody>
-        </p:sp>
-        <p:sp>
-          <p:nvSpPr>
-            <p:cNvPr id="5" name="이등변 삼각형 4">
-              <a:extLst>
-                <a:ext uri="{FF2B5EF4-FFF2-40B4-BE49-F238E27FC236}">
-                  <a16:creationId xmlns:a16="http://schemas.microsoft.com/office/drawing/2014/main" id="{2B1E135D-149B-41CA-BD11-23F176592009}"/>
-                </a:ext>
-              </a:extLst>
-            </p:cNvPr>
-            <p:cNvSpPr/>
-            <p:nvPr/>
-          </p:nvSpPr>
-          <p:spPr>
-            <a:xfrm rot="16200000">
-              <a:off x="1605262" y="2964957"/>
-              <a:ext cx="625327" cy="390162"/>
-            </a:xfrm>
-            <a:prstGeom prst="triangle">
-              <a:avLst/>
-            </a:prstGeom>
-            <a:solidFill>
-              <a:schemeClr val="bg1"/>
-            </a:solidFill>
-            <a:ln>
-              <a:solidFill>
-                <a:schemeClr val="tx1"/>
-              </a:solidFill>
-            </a:ln>
-          </p:spPr>
-          <p:style>
-            <a:lnRef idx="2">
-              <a:schemeClr val="accent1">
-                <a:shade val="50000"/>
-              </a:schemeClr>
-            </a:lnRef>
-            <a:fillRef idx="1">
-              <a:schemeClr val="accent1"/>
-            </a:fillRef>
-            <a:effectRef idx="0">
-              <a:schemeClr val="accent1"/>
-            </a:effectRef>
-            <a:fontRef idx="minor">
-              <a:schemeClr val="lt1"/>
-            </a:fontRef>
-          </p:style>
-          <p:txBody>
-            <a:bodyPr rtlCol="0" anchor="ctr"/>
-            <a:lstStyle/>
-            <a:p>
-              <a:pPr algn="ctr"/>
-              <a:endParaRPr lang="ko-KR" altLang="en-US"/>
-            </a:p>
-          </p:txBody>
-        </p:sp>
-        <p:sp>
-          <p:nvSpPr>
-            <p:cNvPr id="6" name="직사각형 5">
-              <a:extLst>
-                <a:ext uri="{FF2B5EF4-FFF2-40B4-BE49-F238E27FC236}">
-                  <a16:creationId xmlns:a16="http://schemas.microsoft.com/office/drawing/2014/main" id="{BF148C13-4044-4DF7-AB6D-0EF28DA92AEB}"/>
-                </a:ext>
-              </a:extLst>
-            </p:cNvPr>
-            <p:cNvSpPr/>
-            <p:nvPr/>
-          </p:nvSpPr>
-          <p:spPr>
-            <a:xfrm>
-              <a:off x="2113005" y="2864255"/>
-              <a:ext cx="86498" cy="587797"/>
-            </a:xfrm>
-            <a:prstGeom prst="rect">
-              <a:avLst/>
-            </a:prstGeom>
-            <a:solidFill>
-              <a:schemeClr val="bg1"/>
-            </a:solidFill>
-            <a:ln>
-              <a:solidFill>
-                <a:schemeClr val="bg1"/>
-              </a:solidFill>
-            </a:ln>
-          </p:spPr>
-          <p:style>
-            <a:lnRef idx="2">
-              <a:schemeClr val="accent1">
-                <a:shade val="50000"/>
-              </a:schemeClr>
-            </a:lnRef>
-            <a:fillRef idx="1">
-              <a:schemeClr val="accent1"/>
-            </a:fillRef>
-            <a:effectRef idx="0">
-              <a:schemeClr val="accent1"/>
-            </a:effectRef>
-            <a:fontRef idx="minor">
-              <a:schemeClr val="lt1"/>
-            </a:fontRef>
-          </p:style>
-          <p:txBody>
-            <a:bodyPr rtlCol="0" anchor="ctr"/>
-            <a:lstStyle/>
-            <a:p>
-              <a:pPr algn="ctr"/>
-              <a:endParaRPr lang="ko-KR" altLang="en-US"/>
-            </a:p>
-          </p:txBody>
-        </p:sp>
-      </p:grpSp>
-      <p:sp>
-        <p:nvSpPr>
-          <p:cNvPr id="8" name="TextBox 7">
-            <a:extLst>
-              <a:ext uri="{FF2B5EF4-FFF2-40B4-BE49-F238E27FC236}">
-                <a16:creationId xmlns:a16="http://schemas.microsoft.com/office/drawing/2014/main" id="{FCF28443-788A-46CB-A93C-D04242D73E28}"/>
-              </a:ext>
-            </a:extLst>
-          </p:cNvPr>
-          <p:cNvSpPr txBox="1"/>
-          <p:nvPr/>
-        </p:nvSpPr>
-        <p:spPr>
-          <a:xfrm>
-            <a:off x="1824681" y="3935782"/>
-            <a:ext cx="1169773" cy="1015663"/>
-          </a:xfrm>
-          <a:prstGeom prst="rect">
-            <a:avLst/>
-          </a:prstGeom>
-          <a:noFill/>
-        </p:spPr>
-        <p:txBody>
-          <a:bodyPr wrap="square">
-            <a:spAutoFit/>
-          </a:bodyPr>
-          <a:lstStyle/>
-          <a:p>
-            <a:r>
-              <a:rPr lang="ko-KR" altLang="en-US" sz="6000" dirty="0"/>
-              <a:t>😎</a:t>
-            </a:r>
-          </a:p>
-        </p:txBody>
-      </p:sp>
-      <p:sp>
-        <p:nvSpPr>
-          <p:cNvPr id="10" name="TextBox 9">
-            <a:extLst>
-              <a:ext uri="{FF2B5EF4-FFF2-40B4-BE49-F238E27FC236}">
-                <a16:creationId xmlns:a16="http://schemas.microsoft.com/office/drawing/2014/main" id="{80125839-A156-47EC-800A-46B9F15FFE80}"/>
-              </a:ext>
-            </a:extLst>
-          </p:cNvPr>
-          <p:cNvSpPr txBox="1"/>
-          <p:nvPr/>
-        </p:nvSpPr>
-        <p:spPr>
-          <a:xfrm>
-            <a:off x="2913002" y="2202728"/>
-            <a:ext cx="3970685" cy="1015663"/>
-          </a:xfrm>
-          <a:prstGeom prst="rect">
-            <a:avLst/>
-          </a:prstGeom>
-          <a:noFill/>
-        </p:spPr>
-        <p:txBody>
-          <a:bodyPr wrap="square">
-            <a:spAutoFit/>
-          </a:bodyPr>
-          <a:lstStyle/>
-          <a:p>
-            <a:r>
-              <a:rPr lang="ko-KR" altLang="en-US" sz="6000" dirty="0"/>
-              <a:t>❄️  → 🔥</a:t>
-            </a:r>
-          </a:p>
-        </p:txBody>
-      </p:sp>
-      <p:sp>
-        <p:nvSpPr>
-          <p:cNvPr id="13" name="TextBox 12">
-            <a:extLst>
-              <a:ext uri="{FF2B5EF4-FFF2-40B4-BE49-F238E27FC236}">
-                <a16:creationId xmlns:a16="http://schemas.microsoft.com/office/drawing/2014/main" id="{9EB50CEB-7B95-401D-938B-4A595B85EFAE}"/>
-              </a:ext>
-            </a:extLst>
-          </p:cNvPr>
-          <p:cNvSpPr txBox="1"/>
-          <p:nvPr/>
-        </p:nvSpPr>
-        <p:spPr>
-          <a:xfrm>
-            <a:off x="3207249" y="3304030"/>
-            <a:ext cx="6097712" cy="369332"/>
-          </a:xfrm>
-          <a:prstGeom prst="rect">
-            <a:avLst/>
-          </a:prstGeom>
-          <a:noFill/>
-        </p:spPr>
-        <p:txBody>
-          <a:bodyPr wrap="square">
-            <a:spAutoFit/>
-          </a:bodyPr>
-          <a:lstStyle/>
-          <a:p>
-            <a:r>
-              <a:rPr lang="ko-KR" altLang="en-US" dirty="0"/>
-              <a:t>추움                       가스 수요↑</a:t>
-            </a:r>
-          </a:p>
-        </p:txBody>
-      </p:sp>
       <p:pic>
         <p:nvPicPr>
           <p:cNvPr id="16" name="그림 15">
@@ -4076,7 +3856,7 @@
         </p:blipFill>
         <p:spPr>
           <a:xfrm>
-            <a:off x="10074063" y="0"/>
+            <a:off x="-711072" y="-2061577"/>
             <a:ext cx="5071505" cy="2681750"/>
           </a:xfrm>
           <a:prstGeom prst="rect">
@@ -4084,6 +3864,680 @@
           </a:prstGeom>
         </p:spPr>
       </p:pic>
+      <p:grpSp>
+        <p:nvGrpSpPr>
+          <p:cNvPr id="29" name="그룹 28">
+            <a:extLst>
+              <a:ext uri="{FF2B5EF4-FFF2-40B4-BE49-F238E27FC236}">
+                <a16:creationId xmlns:a16="http://schemas.microsoft.com/office/drawing/2014/main" id="{776BB67E-61D5-4DA7-8710-313C33717652}"/>
+              </a:ext>
+            </a:extLst>
+          </p:cNvPr>
+          <p:cNvGrpSpPr/>
+          <p:nvPr/>
+        </p:nvGrpSpPr>
+        <p:grpSpPr>
+          <a:xfrm>
+            <a:off x="-2747319" y="2528193"/>
+            <a:ext cx="7480280" cy="2748717"/>
+            <a:chOff x="1824681" y="2202728"/>
+            <a:chExt cx="7480280" cy="2748717"/>
+          </a:xfrm>
+        </p:grpSpPr>
+        <p:grpSp>
+          <p:nvGrpSpPr>
+            <p:cNvPr id="30" name="그룹 29">
+              <a:extLst>
+                <a:ext uri="{FF2B5EF4-FFF2-40B4-BE49-F238E27FC236}">
+                  <a16:creationId xmlns:a16="http://schemas.microsoft.com/office/drawing/2014/main" id="{819582E3-589A-4E2F-9B7B-3A6D0238A0AE}"/>
+                </a:ext>
+              </a:extLst>
+            </p:cNvPr>
+            <p:cNvGrpSpPr/>
+            <p:nvPr/>
+          </p:nvGrpSpPr>
+          <p:grpSpPr>
+            <a:xfrm>
+              <a:off x="3107470" y="4156722"/>
+              <a:ext cx="5229891" cy="573781"/>
+              <a:chOff x="1722845" y="2529015"/>
+              <a:chExt cx="5229891" cy="1375719"/>
+            </a:xfrm>
+          </p:grpSpPr>
+          <p:sp>
+            <p:nvSpPr>
+              <p:cNvPr id="34" name="사각형: 둥근 모서리 33">
+                <a:extLst>
+                  <a:ext uri="{FF2B5EF4-FFF2-40B4-BE49-F238E27FC236}">
+                    <a16:creationId xmlns:a16="http://schemas.microsoft.com/office/drawing/2014/main" id="{EB736A9A-A4E1-40C7-8D91-B185915B2C11}"/>
+                  </a:ext>
+                </a:extLst>
+              </p:cNvPr>
+              <p:cNvSpPr/>
+              <p:nvPr/>
+            </p:nvSpPr>
+            <p:spPr>
+              <a:xfrm>
+                <a:off x="2113005" y="2529015"/>
+                <a:ext cx="4839731" cy="1375719"/>
+              </a:xfrm>
+              <a:prstGeom prst="roundRect">
+                <a:avLst/>
+              </a:prstGeom>
+              <a:solidFill>
+                <a:schemeClr val="bg1"/>
+              </a:solidFill>
+              <a:ln>
+                <a:solidFill>
+                  <a:schemeClr val="tx1"/>
+                </a:solidFill>
+              </a:ln>
+            </p:spPr>
+            <p:style>
+              <a:lnRef idx="2">
+                <a:schemeClr val="accent1">
+                  <a:shade val="50000"/>
+                </a:schemeClr>
+              </a:lnRef>
+              <a:fillRef idx="1">
+                <a:schemeClr val="accent1"/>
+              </a:fillRef>
+              <a:effectRef idx="0">
+                <a:schemeClr val="accent1"/>
+              </a:effectRef>
+              <a:fontRef idx="minor">
+                <a:schemeClr val="lt1"/>
+              </a:fontRef>
+            </p:style>
+            <p:txBody>
+              <a:bodyPr rtlCol="0" anchor="ctr"/>
+              <a:lstStyle/>
+              <a:p>
+                <a:pPr algn="ctr"/>
+                <a:r>
+                  <a:rPr lang="ko-KR" altLang="en-US" dirty="0">
+                    <a:solidFill>
+                      <a:schemeClr val="tx1"/>
+                    </a:solidFill>
+                  </a:rPr>
+                  <a:t>추운 날이니 가스물량이 많겠구만</a:t>
+                </a:r>
+                <a:r>
+                  <a:rPr lang="en-US" altLang="ko-KR" dirty="0">
+                    <a:solidFill>
+                      <a:schemeClr val="tx1"/>
+                    </a:solidFill>
+                  </a:rPr>
+                  <a:t>!</a:t>
+                </a:r>
+                <a:endParaRPr lang="ko-KR" altLang="en-US" dirty="0">
+                  <a:solidFill>
+                    <a:schemeClr val="tx1"/>
+                  </a:solidFill>
+                </a:endParaRPr>
+              </a:p>
+            </p:txBody>
+          </p:sp>
+          <p:sp>
+            <p:nvSpPr>
+              <p:cNvPr id="35" name="이등변 삼각형 34">
+                <a:extLst>
+                  <a:ext uri="{FF2B5EF4-FFF2-40B4-BE49-F238E27FC236}">
+                    <a16:creationId xmlns:a16="http://schemas.microsoft.com/office/drawing/2014/main" id="{976A0F92-E555-4296-8475-33EC95AB87B8}"/>
+                  </a:ext>
+                </a:extLst>
+              </p:cNvPr>
+              <p:cNvSpPr/>
+              <p:nvPr/>
+            </p:nvSpPr>
+            <p:spPr>
+              <a:xfrm rot="16200000">
+                <a:off x="1605262" y="2964957"/>
+                <a:ext cx="625327" cy="390162"/>
+              </a:xfrm>
+              <a:prstGeom prst="triangle">
+                <a:avLst/>
+              </a:prstGeom>
+              <a:solidFill>
+                <a:schemeClr val="bg1"/>
+              </a:solidFill>
+              <a:ln>
+                <a:solidFill>
+                  <a:schemeClr val="tx1"/>
+                </a:solidFill>
+              </a:ln>
+            </p:spPr>
+            <p:style>
+              <a:lnRef idx="2">
+                <a:schemeClr val="accent1">
+                  <a:shade val="50000"/>
+                </a:schemeClr>
+              </a:lnRef>
+              <a:fillRef idx="1">
+                <a:schemeClr val="accent1"/>
+              </a:fillRef>
+              <a:effectRef idx="0">
+                <a:schemeClr val="accent1"/>
+              </a:effectRef>
+              <a:fontRef idx="minor">
+                <a:schemeClr val="lt1"/>
+              </a:fontRef>
+            </p:style>
+            <p:txBody>
+              <a:bodyPr rtlCol="0" anchor="ctr"/>
+              <a:lstStyle/>
+              <a:p>
+                <a:pPr algn="ctr"/>
+                <a:endParaRPr lang="ko-KR" altLang="en-US"/>
+              </a:p>
+            </p:txBody>
+          </p:sp>
+          <p:sp>
+            <p:nvSpPr>
+              <p:cNvPr id="36" name="직사각형 35">
+                <a:extLst>
+                  <a:ext uri="{FF2B5EF4-FFF2-40B4-BE49-F238E27FC236}">
+                    <a16:creationId xmlns:a16="http://schemas.microsoft.com/office/drawing/2014/main" id="{835FDEFA-3E89-4628-8DF8-B64DF4491DE6}"/>
+                  </a:ext>
+                </a:extLst>
+              </p:cNvPr>
+              <p:cNvSpPr/>
+              <p:nvPr/>
+            </p:nvSpPr>
+            <p:spPr>
+              <a:xfrm>
+                <a:off x="2113005" y="2864255"/>
+                <a:ext cx="86498" cy="587797"/>
+              </a:xfrm>
+              <a:prstGeom prst="rect">
+                <a:avLst/>
+              </a:prstGeom>
+              <a:solidFill>
+                <a:schemeClr val="bg1"/>
+              </a:solidFill>
+              <a:ln>
+                <a:solidFill>
+                  <a:schemeClr val="bg1"/>
+                </a:solidFill>
+              </a:ln>
+            </p:spPr>
+            <p:style>
+              <a:lnRef idx="2">
+                <a:schemeClr val="accent1">
+                  <a:shade val="50000"/>
+                </a:schemeClr>
+              </a:lnRef>
+              <a:fillRef idx="1">
+                <a:schemeClr val="accent1"/>
+              </a:fillRef>
+              <a:effectRef idx="0">
+                <a:schemeClr val="accent1"/>
+              </a:effectRef>
+              <a:fontRef idx="minor">
+                <a:schemeClr val="lt1"/>
+              </a:fontRef>
+            </p:style>
+            <p:txBody>
+              <a:bodyPr rtlCol="0" anchor="ctr"/>
+              <a:lstStyle/>
+              <a:p>
+                <a:pPr algn="ctr"/>
+                <a:endParaRPr lang="ko-KR" altLang="en-US"/>
+              </a:p>
+            </p:txBody>
+          </p:sp>
+        </p:grpSp>
+        <p:sp>
+          <p:nvSpPr>
+            <p:cNvPr id="31" name="TextBox 30">
+              <a:extLst>
+                <a:ext uri="{FF2B5EF4-FFF2-40B4-BE49-F238E27FC236}">
+                  <a16:creationId xmlns:a16="http://schemas.microsoft.com/office/drawing/2014/main" id="{9B58A21B-AC5B-4F08-B674-238B7C9DD379}"/>
+                </a:ext>
+              </a:extLst>
+            </p:cNvPr>
+            <p:cNvSpPr txBox="1"/>
+            <p:nvPr/>
+          </p:nvSpPr>
+          <p:spPr>
+            <a:xfrm>
+              <a:off x="1824681" y="3935782"/>
+              <a:ext cx="1169773" cy="1015663"/>
+            </a:xfrm>
+            <a:prstGeom prst="rect">
+              <a:avLst/>
+            </a:prstGeom>
+            <a:noFill/>
+          </p:spPr>
+          <p:txBody>
+            <a:bodyPr wrap="square">
+              <a:spAutoFit/>
+            </a:bodyPr>
+            <a:lstStyle/>
+            <a:p>
+              <a:r>
+                <a:rPr lang="ko-KR" altLang="en-US" sz="6000" dirty="0"/>
+                <a:t>😎</a:t>
+              </a:r>
+            </a:p>
+          </p:txBody>
+        </p:sp>
+        <p:sp>
+          <p:nvSpPr>
+            <p:cNvPr id="32" name="TextBox 31">
+              <a:extLst>
+                <a:ext uri="{FF2B5EF4-FFF2-40B4-BE49-F238E27FC236}">
+                  <a16:creationId xmlns:a16="http://schemas.microsoft.com/office/drawing/2014/main" id="{F2E8D2FF-2240-4947-9D81-C3E39A1E20B7}"/>
+                </a:ext>
+              </a:extLst>
+            </p:cNvPr>
+            <p:cNvSpPr txBox="1"/>
+            <p:nvPr/>
+          </p:nvSpPr>
+          <p:spPr>
+            <a:xfrm>
+              <a:off x="2913002" y="2202728"/>
+              <a:ext cx="3970685" cy="1015663"/>
+            </a:xfrm>
+            <a:prstGeom prst="rect">
+              <a:avLst/>
+            </a:prstGeom>
+            <a:noFill/>
+          </p:spPr>
+          <p:txBody>
+            <a:bodyPr wrap="square">
+              <a:spAutoFit/>
+            </a:bodyPr>
+            <a:lstStyle/>
+            <a:p>
+              <a:r>
+                <a:rPr lang="ko-KR" altLang="en-US" sz="6000" dirty="0"/>
+                <a:t>❄️  → 🔥</a:t>
+              </a:r>
+            </a:p>
+          </p:txBody>
+        </p:sp>
+        <p:sp>
+          <p:nvSpPr>
+            <p:cNvPr id="33" name="TextBox 32">
+              <a:extLst>
+                <a:ext uri="{FF2B5EF4-FFF2-40B4-BE49-F238E27FC236}">
+                  <a16:creationId xmlns:a16="http://schemas.microsoft.com/office/drawing/2014/main" id="{457D6FE3-F11B-41F3-BBE3-277089248B55}"/>
+                </a:ext>
+              </a:extLst>
+            </p:cNvPr>
+            <p:cNvSpPr txBox="1"/>
+            <p:nvPr/>
+          </p:nvSpPr>
+          <p:spPr>
+            <a:xfrm>
+              <a:off x="3207249" y="3304030"/>
+              <a:ext cx="6097712" cy="369332"/>
+            </a:xfrm>
+            <a:prstGeom prst="rect">
+              <a:avLst/>
+            </a:prstGeom>
+            <a:noFill/>
+          </p:spPr>
+          <p:txBody>
+            <a:bodyPr wrap="square">
+              <a:spAutoFit/>
+            </a:bodyPr>
+            <a:lstStyle/>
+            <a:p>
+              <a:r>
+                <a:rPr lang="ko-KR" altLang="en-US" dirty="0"/>
+                <a:t>추움                       가스 수요↑</a:t>
+              </a:r>
+            </a:p>
+          </p:txBody>
+        </p:sp>
+      </p:grpSp>
+      <p:grpSp>
+        <p:nvGrpSpPr>
+          <p:cNvPr id="37" name="그룹 36">
+            <a:extLst>
+              <a:ext uri="{FF2B5EF4-FFF2-40B4-BE49-F238E27FC236}">
+                <a16:creationId xmlns:a16="http://schemas.microsoft.com/office/drawing/2014/main" id="{C67C7A20-C263-4DF2-AB71-A61C1EF50296}"/>
+              </a:ext>
+            </a:extLst>
+          </p:cNvPr>
+          <p:cNvGrpSpPr/>
+          <p:nvPr/>
+        </p:nvGrpSpPr>
+        <p:grpSpPr>
+          <a:xfrm>
+            <a:off x="4360433" y="1685411"/>
+            <a:ext cx="7073390" cy="3487178"/>
+            <a:chOff x="2217760" y="1360972"/>
+            <a:chExt cx="7073390" cy="3487178"/>
+          </a:xfrm>
+        </p:grpSpPr>
+        <p:sp>
+          <p:nvSpPr>
+            <p:cNvPr id="38" name="TextBox 37">
+              <a:extLst>
+                <a:ext uri="{FF2B5EF4-FFF2-40B4-BE49-F238E27FC236}">
+                  <a16:creationId xmlns:a16="http://schemas.microsoft.com/office/drawing/2014/main" id="{1E0A8A36-973E-4262-8F3E-75564673302F}"/>
+                </a:ext>
+              </a:extLst>
+            </p:cNvPr>
+            <p:cNvSpPr txBox="1"/>
+            <p:nvPr/>
+          </p:nvSpPr>
+          <p:spPr>
+            <a:xfrm>
+              <a:off x="2217760" y="3832487"/>
+              <a:ext cx="1297460" cy="1015663"/>
+            </a:xfrm>
+            <a:prstGeom prst="rect">
+              <a:avLst/>
+            </a:prstGeom>
+            <a:noFill/>
+          </p:spPr>
+          <p:txBody>
+            <a:bodyPr wrap="square">
+              <a:spAutoFit/>
+            </a:bodyPr>
+            <a:lstStyle/>
+            <a:p>
+              <a:r>
+                <a:rPr lang="ko-KR" altLang="en-US" sz="6000" dirty="0"/>
+                <a:t>🤔</a:t>
+              </a:r>
+            </a:p>
+          </p:txBody>
+        </p:sp>
+        <p:sp>
+          <p:nvSpPr>
+            <p:cNvPr id="39" name="TextBox 38">
+              <a:extLst>
+                <a:ext uri="{FF2B5EF4-FFF2-40B4-BE49-F238E27FC236}">
+                  <a16:creationId xmlns:a16="http://schemas.microsoft.com/office/drawing/2014/main" id="{EDEFC6CF-0B1C-4DCA-8299-5AE854525CEB}"/>
+                </a:ext>
+              </a:extLst>
+            </p:cNvPr>
+            <p:cNvSpPr txBox="1"/>
+            <p:nvPr/>
+          </p:nvSpPr>
+          <p:spPr>
+            <a:xfrm>
+              <a:off x="3020602" y="1360972"/>
+              <a:ext cx="5335902" cy="1938992"/>
+            </a:xfrm>
+            <a:prstGeom prst="rect">
+              <a:avLst/>
+            </a:prstGeom>
+            <a:noFill/>
+          </p:spPr>
+          <p:txBody>
+            <a:bodyPr wrap="square" rtlCol="0">
+              <a:spAutoFit/>
+            </a:bodyPr>
+            <a:lstStyle/>
+            <a:p>
+              <a:r>
+                <a:rPr lang="ko-KR" altLang="en-US" sz="6000" dirty="0"/>
+                <a:t>  ❄️</a:t>
+              </a:r>
+              <a:endParaRPr lang="en-US" altLang="ko-KR" sz="6000" dirty="0"/>
+            </a:p>
+            <a:p>
+              <a:r>
+                <a:rPr lang="ko-KR" altLang="en-US" sz="6000" dirty="0"/>
+                <a:t>☀️💨  →  🔥</a:t>
+              </a:r>
+            </a:p>
+          </p:txBody>
+        </p:sp>
+        <p:grpSp>
+          <p:nvGrpSpPr>
+            <p:cNvPr id="40" name="그룹 39">
+              <a:extLst>
+                <a:ext uri="{FF2B5EF4-FFF2-40B4-BE49-F238E27FC236}">
+                  <a16:creationId xmlns:a16="http://schemas.microsoft.com/office/drawing/2014/main" id="{342A780B-2970-4AF4-B59A-AD55BF7B36FC}"/>
+                </a:ext>
+              </a:extLst>
+            </p:cNvPr>
+            <p:cNvGrpSpPr/>
+            <p:nvPr/>
+          </p:nvGrpSpPr>
+          <p:grpSpPr>
+            <a:xfrm>
+              <a:off x="3479342" y="4077920"/>
+              <a:ext cx="5229891" cy="573781"/>
+              <a:chOff x="1722845" y="2529015"/>
+              <a:chExt cx="5229891" cy="1375719"/>
+            </a:xfrm>
+          </p:grpSpPr>
+          <p:sp>
+            <p:nvSpPr>
+              <p:cNvPr id="42" name="사각형: 둥근 모서리 41">
+                <a:extLst>
+                  <a:ext uri="{FF2B5EF4-FFF2-40B4-BE49-F238E27FC236}">
+                    <a16:creationId xmlns:a16="http://schemas.microsoft.com/office/drawing/2014/main" id="{25D5C4BE-17AD-4F98-AA38-332BEA43A863}"/>
+                  </a:ext>
+                </a:extLst>
+              </p:cNvPr>
+              <p:cNvSpPr/>
+              <p:nvPr/>
+            </p:nvSpPr>
+            <p:spPr>
+              <a:xfrm>
+                <a:off x="2113005" y="2529015"/>
+                <a:ext cx="4839731" cy="1375719"/>
+              </a:xfrm>
+              <a:prstGeom prst="roundRect">
+                <a:avLst/>
+              </a:prstGeom>
+              <a:solidFill>
+                <a:schemeClr val="bg1"/>
+              </a:solidFill>
+              <a:ln>
+                <a:solidFill>
+                  <a:schemeClr val="tx1"/>
+                </a:solidFill>
+              </a:ln>
+            </p:spPr>
+            <p:style>
+              <a:lnRef idx="2">
+                <a:schemeClr val="accent1">
+                  <a:shade val="50000"/>
+                </a:schemeClr>
+              </a:lnRef>
+              <a:fillRef idx="1">
+                <a:schemeClr val="accent1"/>
+              </a:fillRef>
+              <a:effectRef idx="0">
+                <a:schemeClr val="accent1"/>
+              </a:effectRef>
+              <a:fontRef idx="minor">
+                <a:schemeClr val="lt1"/>
+              </a:fontRef>
+            </p:style>
+            <p:txBody>
+              <a:bodyPr rtlCol="0" anchor="ctr"/>
+              <a:lstStyle/>
+              <a:p>
+                <a:pPr algn="ctr"/>
+                <a:r>
+                  <a:rPr lang="ko-KR" altLang="en-US" dirty="0">
+                    <a:solidFill>
+                      <a:schemeClr val="tx1"/>
+                    </a:solidFill>
+                  </a:rPr>
+                  <a:t>이렇게 추운데 가스가 왜 안 나가지</a:t>
+                </a:r>
+                <a:r>
+                  <a:rPr lang="en-US" altLang="ko-KR" dirty="0">
+                    <a:solidFill>
+                      <a:schemeClr val="tx1"/>
+                    </a:solidFill>
+                  </a:rPr>
+                  <a:t>?</a:t>
+                </a:r>
+                <a:endParaRPr lang="ko-KR" altLang="en-US" dirty="0">
+                  <a:solidFill>
+                    <a:schemeClr val="tx1"/>
+                  </a:solidFill>
+                </a:endParaRPr>
+              </a:p>
+            </p:txBody>
+          </p:sp>
+          <p:sp>
+            <p:nvSpPr>
+              <p:cNvPr id="43" name="이등변 삼각형 42">
+                <a:extLst>
+                  <a:ext uri="{FF2B5EF4-FFF2-40B4-BE49-F238E27FC236}">
+                    <a16:creationId xmlns:a16="http://schemas.microsoft.com/office/drawing/2014/main" id="{5C3F5759-81ED-4109-BC31-2F9F9D4E1758}"/>
+                  </a:ext>
+                </a:extLst>
+              </p:cNvPr>
+              <p:cNvSpPr/>
+              <p:nvPr/>
+            </p:nvSpPr>
+            <p:spPr>
+              <a:xfrm rot="16200000">
+                <a:off x="1605262" y="2964957"/>
+                <a:ext cx="625327" cy="390162"/>
+              </a:xfrm>
+              <a:prstGeom prst="triangle">
+                <a:avLst/>
+              </a:prstGeom>
+              <a:solidFill>
+                <a:schemeClr val="bg1"/>
+              </a:solidFill>
+              <a:ln>
+                <a:solidFill>
+                  <a:schemeClr val="tx1"/>
+                </a:solidFill>
+              </a:ln>
+            </p:spPr>
+            <p:style>
+              <a:lnRef idx="2">
+                <a:schemeClr val="accent1">
+                  <a:shade val="50000"/>
+                </a:schemeClr>
+              </a:lnRef>
+              <a:fillRef idx="1">
+                <a:schemeClr val="accent1"/>
+              </a:fillRef>
+              <a:effectRef idx="0">
+                <a:schemeClr val="accent1"/>
+              </a:effectRef>
+              <a:fontRef idx="minor">
+                <a:schemeClr val="lt1"/>
+              </a:fontRef>
+            </p:style>
+            <p:txBody>
+              <a:bodyPr rtlCol="0" anchor="ctr"/>
+              <a:lstStyle/>
+              <a:p>
+                <a:pPr algn="ctr"/>
+                <a:endParaRPr lang="ko-KR" altLang="en-US"/>
+              </a:p>
+            </p:txBody>
+          </p:sp>
+          <p:sp>
+            <p:nvSpPr>
+              <p:cNvPr id="44" name="직사각형 43">
+                <a:extLst>
+                  <a:ext uri="{FF2B5EF4-FFF2-40B4-BE49-F238E27FC236}">
+                    <a16:creationId xmlns:a16="http://schemas.microsoft.com/office/drawing/2014/main" id="{1D744BA1-7555-485B-B033-717B5EC2DB8C}"/>
+                  </a:ext>
+                </a:extLst>
+              </p:cNvPr>
+              <p:cNvSpPr/>
+              <p:nvPr/>
+            </p:nvSpPr>
+            <p:spPr>
+              <a:xfrm>
+                <a:off x="2113005" y="2864255"/>
+                <a:ext cx="86498" cy="587797"/>
+              </a:xfrm>
+              <a:prstGeom prst="rect">
+                <a:avLst/>
+              </a:prstGeom>
+              <a:solidFill>
+                <a:schemeClr val="bg1"/>
+              </a:solidFill>
+              <a:ln>
+                <a:solidFill>
+                  <a:schemeClr val="bg1"/>
+                </a:solidFill>
+              </a:ln>
+            </p:spPr>
+            <p:style>
+              <a:lnRef idx="2">
+                <a:schemeClr val="accent1">
+                  <a:shade val="50000"/>
+                </a:schemeClr>
+              </a:lnRef>
+              <a:fillRef idx="1">
+                <a:schemeClr val="accent1"/>
+              </a:fillRef>
+              <a:effectRef idx="0">
+                <a:schemeClr val="accent1"/>
+              </a:effectRef>
+              <a:fontRef idx="minor">
+                <a:schemeClr val="lt1"/>
+              </a:fontRef>
+            </p:style>
+            <p:txBody>
+              <a:bodyPr rtlCol="0" anchor="ctr"/>
+              <a:lstStyle/>
+              <a:p>
+                <a:pPr algn="ctr"/>
+                <a:endParaRPr lang="ko-KR" altLang="en-US"/>
+              </a:p>
+            </p:txBody>
+          </p:sp>
+        </p:grpSp>
+        <p:sp>
+          <p:nvSpPr>
+            <p:cNvPr id="41" name="TextBox 40">
+              <a:extLst>
+                <a:ext uri="{FF2B5EF4-FFF2-40B4-BE49-F238E27FC236}">
+                  <a16:creationId xmlns:a16="http://schemas.microsoft.com/office/drawing/2014/main" id="{22A256B3-C116-4B33-B560-7DC9CC492409}"/>
+                </a:ext>
+              </a:extLst>
+            </p:cNvPr>
+            <p:cNvSpPr txBox="1"/>
+            <p:nvPr/>
+          </p:nvSpPr>
+          <p:spPr>
+            <a:xfrm>
+              <a:off x="3287583" y="3406445"/>
+              <a:ext cx="6003567" cy="369332"/>
+            </a:xfrm>
+            <a:prstGeom prst="rect">
+              <a:avLst/>
+            </a:prstGeom>
+            <a:noFill/>
+          </p:spPr>
+          <p:txBody>
+            <a:bodyPr wrap="none" rtlCol="0">
+              <a:spAutoFit/>
+            </a:bodyPr>
+            <a:lstStyle/>
+            <a:p>
+              <a:r>
+                <a:rPr lang="ko-KR" altLang="en-US"/>
+                <a:t>춥지만 신재생활발                                 </a:t>
+              </a:r>
+              <a:r>
+                <a:rPr lang="ko-KR" altLang="en-US" dirty="0"/>
+                <a:t>가스 수요 </a:t>
+              </a:r>
+              <a:r>
+                <a:rPr lang="en-US" altLang="ko-KR" dirty="0"/>
+                <a:t>?</a:t>
+              </a:r>
+              <a:endParaRPr lang="ko-KR" altLang="en-US" dirty="0"/>
+            </a:p>
+          </p:txBody>
+        </p:sp>
+      </p:grpSp>
     </p:spTree>
     <p:extLst>
       <p:ext uri="{BB962C8B-B14F-4D97-AF65-F5344CB8AC3E}">
@@ -4114,12 +4568,412 @@
           <a:chExt cx="0" cy="0"/>
         </a:xfrm>
       </p:grpSpPr>
+      <p:sp>
+        <p:nvSpPr>
+          <p:cNvPr id="7" name="TextBox 6">
+            <a:extLst>
+              <a:ext uri="{FF2B5EF4-FFF2-40B4-BE49-F238E27FC236}">
+                <a16:creationId xmlns:a16="http://schemas.microsoft.com/office/drawing/2014/main" id="{2579CCF6-CE67-4729-A1B2-D92143CA9272}"/>
+              </a:ext>
+            </a:extLst>
+          </p:cNvPr>
+          <p:cNvSpPr txBox="1"/>
+          <p:nvPr/>
+        </p:nvSpPr>
+        <p:spPr>
+          <a:xfrm>
+            <a:off x="7450796" y="1025830"/>
+            <a:ext cx="646331" cy="369332"/>
+          </a:xfrm>
+          <a:prstGeom prst="rect">
+            <a:avLst/>
+          </a:prstGeom>
+          <a:noFill/>
+        </p:spPr>
+        <p:txBody>
+          <a:bodyPr wrap="none" rtlCol="0">
+            <a:spAutoFit/>
+          </a:bodyPr>
+          <a:lstStyle/>
+          <a:p>
+            <a:r>
+              <a:rPr lang="ko-KR" altLang="en-US"/>
+              <a:t>현재</a:t>
+            </a:r>
+            <a:endParaRPr lang="ko-KR" altLang="en-US" dirty="0"/>
+          </a:p>
+        </p:txBody>
+      </p:sp>
+      <p:sp>
+        <p:nvSpPr>
+          <p:cNvPr id="9" name="TextBox 8">
+            <a:extLst>
+              <a:ext uri="{FF2B5EF4-FFF2-40B4-BE49-F238E27FC236}">
+                <a16:creationId xmlns:a16="http://schemas.microsoft.com/office/drawing/2014/main" id="{A3ECD9B2-E465-4828-B325-EC93E83AF3EC}"/>
+              </a:ext>
+            </a:extLst>
+          </p:cNvPr>
+          <p:cNvSpPr txBox="1"/>
+          <p:nvPr/>
+        </p:nvSpPr>
+        <p:spPr>
+          <a:xfrm>
+            <a:off x="3115521" y="841164"/>
+            <a:ext cx="649840" cy="369332"/>
+          </a:xfrm>
+          <a:prstGeom prst="rect">
+            <a:avLst/>
+          </a:prstGeom>
+          <a:noFill/>
+        </p:spPr>
+        <p:txBody>
+          <a:bodyPr wrap="square">
+            <a:spAutoFit/>
+          </a:bodyPr>
+          <a:lstStyle/>
+          <a:p>
+            <a:r>
+              <a:rPr lang="ko-KR" altLang="en-US" dirty="0"/>
+              <a:t>과거 </a:t>
+            </a:r>
+          </a:p>
+        </p:txBody>
+      </p:sp>
+      <p:grpSp>
+        <p:nvGrpSpPr>
+          <p:cNvPr id="8" name="그룹 7">
+            <a:extLst>
+              <a:ext uri="{FF2B5EF4-FFF2-40B4-BE49-F238E27FC236}">
+                <a16:creationId xmlns:a16="http://schemas.microsoft.com/office/drawing/2014/main" id="{5B3ADFED-2A72-46B2-B809-4887212DE222}"/>
+              </a:ext>
+            </a:extLst>
+          </p:cNvPr>
+          <p:cNvGrpSpPr/>
+          <p:nvPr/>
+        </p:nvGrpSpPr>
+        <p:grpSpPr>
+          <a:xfrm>
+            <a:off x="293681" y="3548101"/>
+            <a:ext cx="7480280" cy="2748717"/>
+            <a:chOff x="1824681" y="2202728"/>
+            <a:chExt cx="7480280" cy="2748717"/>
+          </a:xfrm>
+        </p:grpSpPr>
+        <p:grpSp>
+          <p:nvGrpSpPr>
+            <p:cNvPr id="10" name="그룹 9">
+              <a:extLst>
+                <a:ext uri="{FF2B5EF4-FFF2-40B4-BE49-F238E27FC236}">
+                  <a16:creationId xmlns:a16="http://schemas.microsoft.com/office/drawing/2014/main" id="{C0804019-EB68-46FD-A3A9-30DDFC27A668}"/>
+                </a:ext>
+              </a:extLst>
+            </p:cNvPr>
+            <p:cNvGrpSpPr/>
+            <p:nvPr/>
+          </p:nvGrpSpPr>
+          <p:grpSpPr>
+            <a:xfrm>
+              <a:off x="3107470" y="4156722"/>
+              <a:ext cx="5229891" cy="573781"/>
+              <a:chOff x="1722845" y="2529015"/>
+              <a:chExt cx="5229891" cy="1375719"/>
+            </a:xfrm>
+          </p:grpSpPr>
+          <p:sp>
+            <p:nvSpPr>
+              <p:cNvPr id="14" name="사각형: 둥근 모서리 13">
+                <a:extLst>
+                  <a:ext uri="{FF2B5EF4-FFF2-40B4-BE49-F238E27FC236}">
+                    <a16:creationId xmlns:a16="http://schemas.microsoft.com/office/drawing/2014/main" id="{713DCFEC-B436-49E2-ABAD-995B9B9E7BFE}"/>
+                  </a:ext>
+                </a:extLst>
+              </p:cNvPr>
+              <p:cNvSpPr/>
+              <p:nvPr/>
+            </p:nvSpPr>
+            <p:spPr>
+              <a:xfrm>
+                <a:off x="2113005" y="2529015"/>
+                <a:ext cx="4839731" cy="1375719"/>
+              </a:xfrm>
+              <a:prstGeom prst="roundRect">
+                <a:avLst/>
+              </a:prstGeom>
+              <a:solidFill>
+                <a:schemeClr val="bg1"/>
+              </a:solidFill>
+              <a:ln>
+                <a:solidFill>
+                  <a:schemeClr val="tx1"/>
+                </a:solidFill>
+              </a:ln>
+            </p:spPr>
+            <p:style>
+              <a:lnRef idx="2">
+                <a:schemeClr val="accent1">
+                  <a:shade val="50000"/>
+                </a:schemeClr>
+              </a:lnRef>
+              <a:fillRef idx="1">
+                <a:schemeClr val="accent1"/>
+              </a:fillRef>
+              <a:effectRef idx="0">
+                <a:schemeClr val="accent1"/>
+              </a:effectRef>
+              <a:fontRef idx="minor">
+                <a:schemeClr val="lt1"/>
+              </a:fontRef>
+            </p:style>
+            <p:txBody>
+              <a:bodyPr rtlCol="0" anchor="ctr"/>
+              <a:lstStyle/>
+              <a:p>
+                <a:pPr algn="ctr"/>
+                <a:r>
+                  <a:rPr lang="ko-KR" altLang="en-US" dirty="0">
+                    <a:solidFill>
+                      <a:schemeClr val="tx1"/>
+                    </a:solidFill>
+                  </a:rPr>
+                  <a:t>추운 날이니 가스물량이 많겠구만</a:t>
+                </a:r>
+                <a:r>
+                  <a:rPr lang="en-US" altLang="ko-KR" dirty="0">
+                    <a:solidFill>
+                      <a:schemeClr val="tx1"/>
+                    </a:solidFill>
+                  </a:rPr>
+                  <a:t>!</a:t>
+                </a:r>
+                <a:endParaRPr lang="ko-KR" altLang="en-US" dirty="0">
+                  <a:solidFill>
+                    <a:schemeClr val="tx1"/>
+                  </a:solidFill>
+                </a:endParaRPr>
+              </a:p>
+            </p:txBody>
+          </p:sp>
+          <p:sp>
+            <p:nvSpPr>
+              <p:cNvPr id="15" name="이등변 삼각형 14">
+                <a:extLst>
+                  <a:ext uri="{FF2B5EF4-FFF2-40B4-BE49-F238E27FC236}">
+                    <a16:creationId xmlns:a16="http://schemas.microsoft.com/office/drawing/2014/main" id="{FAD4D753-B694-48A0-820C-49EF2D986665}"/>
+                  </a:ext>
+                </a:extLst>
+              </p:cNvPr>
+              <p:cNvSpPr/>
+              <p:nvPr/>
+            </p:nvSpPr>
+            <p:spPr>
+              <a:xfrm rot="16200000">
+                <a:off x="1605262" y="2964957"/>
+                <a:ext cx="625327" cy="390162"/>
+              </a:xfrm>
+              <a:prstGeom prst="triangle">
+                <a:avLst/>
+              </a:prstGeom>
+              <a:solidFill>
+                <a:schemeClr val="bg1"/>
+              </a:solidFill>
+              <a:ln>
+                <a:solidFill>
+                  <a:schemeClr val="tx1"/>
+                </a:solidFill>
+              </a:ln>
+            </p:spPr>
+            <p:style>
+              <a:lnRef idx="2">
+                <a:schemeClr val="accent1">
+                  <a:shade val="50000"/>
+                </a:schemeClr>
+              </a:lnRef>
+              <a:fillRef idx="1">
+                <a:schemeClr val="accent1"/>
+              </a:fillRef>
+              <a:effectRef idx="0">
+                <a:schemeClr val="accent1"/>
+              </a:effectRef>
+              <a:fontRef idx="minor">
+                <a:schemeClr val="lt1"/>
+              </a:fontRef>
+            </p:style>
+            <p:txBody>
+              <a:bodyPr rtlCol="0" anchor="ctr"/>
+              <a:lstStyle/>
+              <a:p>
+                <a:pPr algn="ctr"/>
+                <a:endParaRPr lang="ko-KR" altLang="en-US"/>
+              </a:p>
+            </p:txBody>
+          </p:sp>
+          <p:sp>
+            <p:nvSpPr>
+              <p:cNvPr id="16" name="직사각형 15">
+                <a:extLst>
+                  <a:ext uri="{FF2B5EF4-FFF2-40B4-BE49-F238E27FC236}">
+                    <a16:creationId xmlns:a16="http://schemas.microsoft.com/office/drawing/2014/main" id="{E12B5555-3FD6-4D34-B6B4-2CB7804C414D}"/>
+                  </a:ext>
+                </a:extLst>
+              </p:cNvPr>
+              <p:cNvSpPr/>
+              <p:nvPr/>
+            </p:nvSpPr>
+            <p:spPr>
+              <a:xfrm>
+                <a:off x="2113005" y="2864255"/>
+                <a:ext cx="86498" cy="587797"/>
+              </a:xfrm>
+              <a:prstGeom prst="rect">
+                <a:avLst/>
+              </a:prstGeom>
+              <a:solidFill>
+                <a:schemeClr val="bg1"/>
+              </a:solidFill>
+              <a:ln>
+                <a:solidFill>
+                  <a:schemeClr val="bg1"/>
+                </a:solidFill>
+              </a:ln>
+            </p:spPr>
+            <p:style>
+              <a:lnRef idx="2">
+                <a:schemeClr val="accent1">
+                  <a:shade val="50000"/>
+                </a:schemeClr>
+              </a:lnRef>
+              <a:fillRef idx="1">
+                <a:schemeClr val="accent1"/>
+              </a:fillRef>
+              <a:effectRef idx="0">
+                <a:schemeClr val="accent1"/>
+              </a:effectRef>
+              <a:fontRef idx="minor">
+                <a:schemeClr val="lt1"/>
+              </a:fontRef>
+            </p:style>
+            <p:txBody>
+              <a:bodyPr rtlCol="0" anchor="ctr"/>
+              <a:lstStyle/>
+              <a:p>
+                <a:pPr algn="ctr"/>
+                <a:endParaRPr lang="ko-KR" altLang="en-US"/>
+              </a:p>
+            </p:txBody>
+          </p:sp>
+        </p:grpSp>
+        <p:sp>
+          <p:nvSpPr>
+            <p:cNvPr id="11" name="TextBox 10">
+              <a:extLst>
+                <a:ext uri="{FF2B5EF4-FFF2-40B4-BE49-F238E27FC236}">
+                  <a16:creationId xmlns:a16="http://schemas.microsoft.com/office/drawing/2014/main" id="{48E97580-FF62-4E29-BA2D-EFBC99581FC8}"/>
+                </a:ext>
+              </a:extLst>
+            </p:cNvPr>
+            <p:cNvSpPr txBox="1"/>
+            <p:nvPr/>
+          </p:nvSpPr>
+          <p:spPr>
+            <a:xfrm>
+              <a:off x="1824681" y="3935782"/>
+              <a:ext cx="1169773" cy="1015663"/>
+            </a:xfrm>
+            <a:prstGeom prst="rect">
+              <a:avLst/>
+            </a:prstGeom>
+            <a:noFill/>
+          </p:spPr>
+          <p:txBody>
+            <a:bodyPr wrap="square">
+              <a:spAutoFit/>
+            </a:bodyPr>
+            <a:lstStyle/>
+            <a:p>
+              <a:r>
+                <a:rPr lang="ko-KR" altLang="en-US" sz="6000" dirty="0"/>
+                <a:t>😎</a:t>
+              </a:r>
+            </a:p>
+          </p:txBody>
+        </p:sp>
+        <p:sp>
+          <p:nvSpPr>
+            <p:cNvPr id="12" name="TextBox 11">
+              <a:extLst>
+                <a:ext uri="{FF2B5EF4-FFF2-40B4-BE49-F238E27FC236}">
+                  <a16:creationId xmlns:a16="http://schemas.microsoft.com/office/drawing/2014/main" id="{3AF92A11-6A06-4183-B40B-0F4D5663211A}"/>
+                </a:ext>
+              </a:extLst>
+            </p:cNvPr>
+            <p:cNvSpPr txBox="1"/>
+            <p:nvPr/>
+          </p:nvSpPr>
+          <p:spPr>
+            <a:xfrm>
+              <a:off x="2913002" y="2202728"/>
+              <a:ext cx="3970685" cy="1015663"/>
+            </a:xfrm>
+            <a:prstGeom prst="rect">
+              <a:avLst/>
+            </a:prstGeom>
+            <a:noFill/>
+          </p:spPr>
+          <p:txBody>
+            <a:bodyPr wrap="square">
+              <a:spAutoFit/>
+            </a:bodyPr>
+            <a:lstStyle/>
+            <a:p>
+              <a:r>
+                <a:rPr lang="ko-KR" altLang="en-US" sz="6000" dirty="0"/>
+                <a:t>❄️  → 🔥</a:t>
+              </a:r>
+            </a:p>
+          </p:txBody>
+        </p:sp>
+        <p:sp>
+          <p:nvSpPr>
+            <p:cNvPr id="13" name="TextBox 12">
+              <a:extLst>
+                <a:ext uri="{FF2B5EF4-FFF2-40B4-BE49-F238E27FC236}">
+                  <a16:creationId xmlns:a16="http://schemas.microsoft.com/office/drawing/2014/main" id="{BFBED0BD-2EFF-4488-8219-070025F8FAAE}"/>
+                </a:ext>
+              </a:extLst>
+            </p:cNvPr>
+            <p:cNvSpPr txBox="1"/>
+            <p:nvPr/>
+          </p:nvSpPr>
+          <p:spPr>
+            <a:xfrm>
+              <a:off x="3207249" y="3304030"/>
+              <a:ext cx="6097712" cy="369332"/>
+            </a:xfrm>
+            <a:prstGeom prst="rect">
+              <a:avLst/>
+            </a:prstGeom>
+            <a:noFill/>
+          </p:spPr>
+          <p:txBody>
+            <a:bodyPr wrap="square">
+              <a:spAutoFit/>
+            </a:bodyPr>
+            <a:lstStyle/>
+            <a:p>
+              <a:r>
+                <a:rPr lang="ko-KR" altLang="en-US" dirty="0"/>
+                <a:t>추움                       가스 수요↑</a:t>
+              </a:r>
+            </a:p>
+          </p:txBody>
+        </p:sp>
+      </p:grpSp>
       <p:pic>
         <p:nvPicPr>
-          <p:cNvPr id="5" name="그림 4">
-            <a:extLst>
-              <a:ext uri="{FF2B5EF4-FFF2-40B4-BE49-F238E27FC236}">
-                <a16:creationId xmlns:a16="http://schemas.microsoft.com/office/drawing/2014/main" id="{95EA7AF0-B4E1-40A2-BEAD-AC249F8ED1B3}"/>
+          <p:cNvPr id="27" name="그림 26">
+            <a:extLst>
+              <a:ext uri="{FF2B5EF4-FFF2-40B4-BE49-F238E27FC236}">
+                <a16:creationId xmlns:a16="http://schemas.microsoft.com/office/drawing/2014/main" id="{A20ABF6A-03A3-43A0-9803-45C4D47AD67F}"/>
               </a:ext>
             </a:extLst>
           </p:cNvPr>
@@ -4136,8 +4990,8 @@
         </p:blipFill>
         <p:spPr>
           <a:xfrm>
-            <a:off x="239105" y="2532457"/>
-            <a:ext cx="4475014" cy="2060683"/>
+            <a:off x="7527752" y="1514861"/>
+            <a:ext cx="4664248" cy="2597225"/>
           </a:xfrm>
           <a:prstGeom prst="rect">
             <a:avLst/>
@@ -4146,10 +5000,10 @@
       </p:pic>
       <p:pic>
         <p:nvPicPr>
-          <p:cNvPr id="6" name="그림 5">
-            <a:extLst>
-              <a:ext uri="{FF2B5EF4-FFF2-40B4-BE49-F238E27FC236}">
-                <a16:creationId xmlns:a16="http://schemas.microsoft.com/office/drawing/2014/main" id="{CA39258C-6026-4E8B-9E6E-DFD7C5DF29FD}"/>
+          <p:cNvPr id="28" name="그림 27">
+            <a:extLst>
+              <a:ext uri="{FF2B5EF4-FFF2-40B4-BE49-F238E27FC236}">
+                <a16:creationId xmlns:a16="http://schemas.microsoft.com/office/drawing/2014/main" id="{745B34A0-4900-4278-8B02-3D58D5E25F97}"/>
               </a:ext>
             </a:extLst>
           </p:cNvPr>
@@ -4166,85 +5020,14 @@
         </p:blipFill>
         <p:spPr>
           <a:xfrm>
-            <a:off x="4714119" y="2219614"/>
-            <a:ext cx="4488617" cy="2373526"/>
+            <a:off x="3863769" y="2334016"/>
+            <a:ext cx="4464461" cy="2189968"/>
           </a:xfrm>
           <a:prstGeom prst="rect">
             <a:avLst/>
           </a:prstGeom>
         </p:spPr>
       </p:pic>
-      <p:sp>
-        <p:nvSpPr>
-          <p:cNvPr id="7" name="TextBox 6">
-            <a:extLst>
-              <a:ext uri="{FF2B5EF4-FFF2-40B4-BE49-F238E27FC236}">
-                <a16:creationId xmlns:a16="http://schemas.microsoft.com/office/drawing/2014/main" id="{2579CCF6-CE67-4729-A1B2-D92143CA9272}"/>
-              </a:ext>
-            </a:extLst>
-          </p:cNvPr>
-          <p:cNvSpPr txBox="1"/>
-          <p:nvPr/>
-        </p:nvSpPr>
-        <p:spPr>
-          <a:xfrm>
-            <a:off x="6958427" y="2455523"/>
-            <a:ext cx="646331" cy="369332"/>
-          </a:xfrm>
-          <a:prstGeom prst="rect">
-            <a:avLst/>
-          </a:prstGeom>
-          <a:noFill/>
-        </p:spPr>
-        <p:txBody>
-          <a:bodyPr wrap="none" rtlCol="0">
-            <a:spAutoFit/>
-          </a:bodyPr>
-          <a:lstStyle/>
-          <a:p>
-            <a:r>
-              <a:rPr lang="ko-KR" altLang="en-US"/>
-              <a:t>현재</a:t>
-            </a:r>
-            <a:endParaRPr lang="ko-KR" altLang="en-US" dirty="0"/>
-          </a:p>
-        </p:txBody>
-      </p:sp>
-      <p:sp>
-        <p:nvSpPr>
-          <p:cNvPr id="9" name="TextBox 8">
-            <a:extLst>
-              <a:ext uri="{FF2B5EF4-FFF2-40B4-BE49-F238E27FC236}">
-                <a16:creationId xmlns:a16="http://schemas.microsoft.com/office/drawing/2014/main" id="{A3ECD9B2-E465-4828-B325-EC93E83AF3EC}"/>
-              </a:ext>
-            </a:extLst>
-          </p:cNvPr>
-          <p:cNvSpPr txBox="1"/>
-          <p:nvPr/>
-        </p:nvSpPr>
-        <p:spPr>
-          <a:xfrm>
-            <a:off x="1928973" y="2455523"/>
-            <a:ext cx="649840" cy="369332"/>
-          </a:xfrm>
-          <a:prstGeom prst="rect">
-            <a:avLst/>
-          </a:prstGeom>
-          <a:noFill/>
-        </p:spPr>
-        <p:txBody>
-          <a:bodyPr wrap="square">
-            <a:spAutoFit/>
-          </a:bodyPr>
-          <a:lstStyle/>
-          <a:p>
-            <a:r>
-              <a:rPr lang="ko-KR" altLang="en-US" dirty="0"/>
-              <a:t>과거 </a:t>
-            </a:r>
-          </a:p>
-        </p:txBody>
-      </p:sp>
     </p:spTree>
     <p:extLst>
       <p:ext uri="{BB962C8B-B14F-4D97-AF65-F5344CB8AC3E}">
@@ -4259,6 +5042,210 @@
 </file>
 
 <file path=ppt/slides/slide4.xml><?xml version="1.0" encoding="utf-8"?>
+<p:sld xmlns:a="http://schemas.openxmlformats.org/drawingml/2006/main" xmlns:r="http://schemas.openxmlformats.org/officeDocument/2006/relationships" xmlns:p="http://schemas.openxmlformats.org/presentationml/2006/main">
+  <p:cSld>
+    <p:spTree>
+      <p:nvGrpSpPr>
+        <p:cNvPr id="1" name=""/>
+        <p:cNvGrpSpPr/>
+        <p:nvPr/>
+      </p:nvGrpSpPr>
+      <p:grpSpPr>
+        <a:xfrm>
+          <a:off x="0" y="0"/>
+          <a:ext cx="0" cy="0"/>
+          <a:chOff x="0" y="0"/>
+          <a:chExt cx="0" cy="0"/>
+        </a:xfrm>
+      </p:grpSpPr>
+      <p:sp>
+        <p:nvSpPr>
+          <p:cNvPr id="4" name="TextBox 3">
+            <a:extLst>
+              <a:ext uri="{FF2B5EF4-FFF2-40B4-BE49-F238E27FC236}">
+                <a16:creationId xmlns:a16="http://schemas.microsoft.com/office/drawing/2014/main" id="{CAFE382E-9B61-450A-8AA3-16C9D6FCE0CA}"/>
+              </a:ext>
+            </a:extLst>
+          </p:cNvPr>
+          <p:cNvSpPr txBox="1"/>
+          <p:nvPr/>
+        </p:nvSpPr>
+        <p:spPr>
+          <a:xfrm>
+            <a:off x="7028762" y="2617358"/>
+            <a:ext cx="646331" cy="369332"/>
+          </a:xfrm>
+          <a:prstGeom prst="rect">
+            <a:avLst/>
+          </a:prstGeom>
+          <a:noFill/>
+        </p:spPr>
+        <p:txBody>
+          <a:bodyPr wrap="none" rtlCol="0">
+            <a:spAutoFit/>
+          </a:bodyPr>
+          <a:lstStyle/>
+          <a:p>
+            <a:r>
+              <a:rPr lang="ko-KR" altLang="en-US" dirty="0"/>
+              <a:t>현재</a:t>
+            </a:r>
+          </a:p>
+        </p:txBody>
+      </p:sp>
+      <p:sp>
+        <p:nvSpPr>
+          <p:cNvPr id="5" name="TextBox 4">
+            <a:extLst>
+              <a:ext uri="{FF2B5EF4-FFF2-40B4-BE49-F238E27FC236}">
+                <a16:creationId xmlns:a16="http://schemas.microsoft.com/office/drawing/2014/main" id="{0F8A84B7-C121-4426-B932-761EB554F148}"/>
+              </a:ext>
+            </a:extLst>
+          </p:cNvPr>
+          <p:cNvSpPr txBox="1"/>
+          <p:nvPr/>
+        </p:nvSpPr>
+        <p:spPr>
+          <a:xfrm>
+            <a:off x="1894066" y="2613744"/>
+            <a:ext cx="649840" cy="369332"/>
+          </a:xfrm>
+          <a:prstGeom prst="rect">
+            <a:avLst/>
+          </a:prstGeom>
+          <a:noFill/>
+        </p:spPr>
+        <p:txBody>
+          <a:bodyPr wrap="square">
+            <a:spAutoFit/>
+          </a:bodyPr>
+          <a:lstStyle/>
+          <a:p>
+            <a:r>
+              <a:rPr lang="ko-KR" altLang="en-US" dirty="0"/>
+              <a:t>과거 </a:t>
+            </a:r>
+          </a:p>
+        </p:txBody>
+      </p:sp>
+      <p:pic>
+        <p:nvPicPr>
+          <p:cNvPr id="6" name="그림 5">
+            <a:extLst>
+              <a:ext uri="{FF2B5EF4-FFF2-40B4-BE49-F238E27FC236}">
+                <a16:creationId xmlns:a16="http://schemas.microsoft.com/office/drawing/2014/main" id="{D0CE421A-AECD-4EE8-B6DF-48FD8B0E3BC8}"/>
+              </a:ext>
+            </a:extLst>
+          </p:cNvPr>
+          <p:cNvPicPr>
+            <a:picLocks noChangeAspect="1"/>
+          </p:cNvPicPr>
+          <p:nvPr/>
+        </p:nvPicPr>
+        <p:blipFill>
+          <a:blip r:embed="rId2"/>
+          <a:stretch>
+            <a:fillRect/>
+          </a:stretch>
+        </p:blipFill>
+        <p:spPr>
+          <a:xfrm>
+            <a:off x="5162996" y="3021743"/>
+            <a:ext cx="4664248" cy="2597225"/>
+          </a:xfrm>
+          <a:prstGeom prst="rect">
+            <a:avLst/>
+          </a:prstGeom>
+        </p:spPr>
+      </p:pic>
+      <p:pic>
+        <p:nvPicPr>
+          <p:cNvPr id="7" name="그림 6">
+            <a:extLst>
+              <a:ext uri="{FF2B5EF4-FFF2-40B4-BE49-F238E27FC236}">
+                <a16:creationId xmlns:a16="http://schemas.microsoft.com/office/drawing/2014/main" id="{B1644BFF-7B6D-4B31-BF53-EF01F6A7E590}"/>
+              </a:ext>
+            </a:extLst>
+          </p:cNvPr>
+          <p:cNvPicPr>
+            <a:picLocks noChangeAspect="1"/>
+          </p:cNvPicPr>
+          <p:nvPr/>
+        </p:nvPicPr>
+        <p:blipFill>
+          <a:blip r:embed="rId3"/>
+          <a:stretch>
+            <a:fillRect/>
+          </a:stretch>
+        </p:blipFill>
+        <p:spPr>
+          <a:xfrm>
+            <a:off x="311676" y="3429000"/>
+            <a:ext cx="4464461" cy="2189968"/>
+          </a:xfrm>
+          <a:prstGeom prst="rect">
+            <a:avLst/>
+          </a:prstGeom>
+        </p:spPr>
+      </p:pic>
+      <p:cxnSp>
+        <p:nvCxnSpPr>
+          <p:cNvPr id="10" name="직선 연결선 9">
+            <a:extLst>
+              <a:ext uri="{FF2B5EF4-FFF2-40B4-BE49-F238E27FC236}">
+                <a16:creationId xmlns:a16="http://schemas.microsoft.com/office/drawing/2014/main" id="{EE8620D3-7CC5-447B-99E0-0B01F31784F0}"/>
+              </a:ext>
+            </a:extLst>
+          </p:cNvPr>
+          <p:cNvCxnSpPr/>
+          <p:nvPr/>
+        </p:nvCxnSpPr>
+        <p:spPr>
+          <a:xfrm>
+            <a:off x="4947138" y="2613744"/>
+            <a:ext cx="0" cy="2896102"/>
+          </a:xfrm>
+          <a:prstGeom prst="line">
+            <a:avLst/>
+          </a:prstGeom>
+          <a:ln w="19050">
+            <a:solidFill>
+              <a:schemeClr val="bg2">
+                <a:lumMod val="90000"/>
+              </a:schemeClr>
+            </a:solidFill>
+            <a:prstDash val="lgDash"/>
+          </a:ln>
+        </p:spPr>
+        <p:style>
+          <a:lnRef idx="1">
+            <a:schemeClr val="accent1"/>
+          </a:lnRef>
+          <a:fillRef idx="0">
+            <a:schemeClr val="accent1"/>
+          </a:fillRef>
+          <a:effectRef idx="0">
+            <a:schemeClr val="accent1"/>
+          </a:effectRef>
+          <a:fontRef idx="minor">
+            <a:schemeClr val="tx1"/>
+          </a:fontRef>
+        </p:style>
+      </p:cxnSp>
+    </p:spTree>
+    <p:extLst>
+      <p:ext uri="{BB962C8B-B14F-4D97-AF65-F5344CB8AC3E}">
+        <p14:creationId xmlns:p14="http://schemas.microsoft.com/office/powerpoint/2010/main" val="933263464"/>
+      </p:ext>
+    </p:extLst>
+  </p:cSld>
+  <p:clrMapOvr>
+    <a:masterClrMapping/>
+  </p:clrMapOvr>
+</p:sld>
+</file>
+
+<file path=ppt/slides/slide5.xml><?xml version="1.0" encoding="utf-8"?>
 <p:sld xmlns:a="http://schemas.openxmlformats.org/drawingml/2006/main" xmlns:r="http://schemas.openxmlformats.org/officeDocument/2006/relationships" xmlns:p="http://schemas.openxmlformats.org/presentationml/2006/main">
   <p:cSld>
     <p:spTree>
@@ -4530,7 +5517,7 @@
 </p:sld>
 </file>
 
-<file path=ppt/slides/slide5.xml><?xml version="1.0" encoding="utf-8"?>
+<file path=ppt/slides/slide6.xml><?xml version="1.0" encoding="utf-8"?>
 <p:sld xmlns:a="http://schemas.openxmlformats.org/drawingml/2006/main" xmlns:r="http://schemas.openxmlformats.org/officeDocument/2006/relationships" xmlns:p="http://schemas.openxmlformats.org/presentationml/2006/main">
   <p:cSld>
     <p:spTree>
@@ -4620,7 +5607,7 @@
 </p:sld>
 </file>
 
-<file path=ppt/slides/slide6.xml><?xml version="1.0" encoding="utf-8"?>
+<file path=ppt/slides/slide7.xml><?xml version="1.0" encoding="utf-8"?>
 <p:sld xmlns:a="http://schemas.openxmlformats.org/drawingml/2006/main" xmlns:r="http://schemas.openxmlformats.org/officeDocument/2006/relationships" xmlns:p="http://schemas.openxmlformats.org/presentationml/2006/main">
   <p:cSld>
     <p:spTree>
@@ -4729,6 +5716,269 @@
     <p:extLst>
       <p:ext uri="{BB962C8B-B14F-4D97-AF65-F5344CB8AC3E}">
         <p14:creationId xmlns:p14="http://schemas.microsoft.com/office/powerpoint/2010/main" val="1400896831"/>
+      </p:ext>
+    </p:extLst>
+  </p:cSld>
+  <p:clrMapOvr>
+    <a:masterClrMapping/>
+  </p:clrMapOvr>
+</p:sld>
+</file>
+
+<file path=ppt/slides/slide8.xml><?xml version="1.0" encoding="utf-8"?>
+<p:sld xmlns:a="http://schemas.openxmlformats.org/drawingml/2006/main" xmlns:r="http://schemas.openxmlformats.org/officeDocument/2006/relationships" xmlns:p="http://schemas.openxmlformats.org/presentationml/2006/main">
+  <p:cSld>
+    <p:spTree>
+      <p:nvGrpSpPr>
+        <p:cNvPr id="1" name=""/>
+        <p:cNvGrpSpPr/>
+        <p:nvPr/>
+      </p:nvGrpSpPr>
+      <p:grpSpPr>
+        <a:xfrm>
+          <a:off x="0" y="0"/>
+          <a:ext cx="0" cy="0"/>
+          <a:chOff x="0" y="0"/>
+          <a:chExt cx="0" cy="0"/>
+        </a:xfrm>
+      </p:grpSpPr>
+      <p:pic>
+        <p:nvPicPr>
+          <p:cNvPr id="5" name="그림 4">
+            <a:extLst>
+              <a:ext uri="{FF2B5EF4-FFF2-40B4-BE49-F238E27FC236}">
+                <a16:creationId xmlns:a16="http://schemas.microsoft.com/office/drawing/2014/main" id="{9D31550A-E1B0-4114-987B-21C6F27BC39B}"/>
+              </a:ext>
+            </a:extLst>
+          </p:cNvPr>
+          <p:cNvPicPr>
+            <a:picLocks noChangeAspect="1"/>
+          </p:cNvPicPr>
+          <p:nvPr/>
+        </p:nvPicPr>
+        <p:blipFill rotWithShape="1">
+          <a:blip r:embed="rId2"/>
+          <a:srcRect l="2257" t="12839" r="48562" b="44212"/>
+          <a:stretch/>
+        </p:blipFill>
+        <p:spPr>
+          <a:xfrm>
+            <a:off x="275129" y="1545579"/>
+            <a:ext cx="5996198" cy="2176757"/>
+          </a:xfrm>
+          <a:prstGeom prst="rect">
+            <a:avLst/>
+          </a:prstGeom>
+        </p:spPr>
+      </p:pic>
+      <p:pic>
+        <p:nvPicPr>
+          <p:cNvPr id="6" name="그림 5">
+            <a:extLst>
+              <a:ext uri="{FF2B5EF4-FFF2-40B4-BE49-F238E27FC236}">
+                <a16:creationId xmlns:a16="http://schemas.microsoft.com/office/drawing/2014/main" id="{646E4927-F08F-4A00-AFCD-8317F6537BCC}"/>
+              </a:ext>
+            </a:extLst>
+          </p:cNvPr>
+          <p:cNvPicPr>
+            <a:picLocks noChangeAspect="1"/>
+          </p:cNvPicPr>
+          <p:nvPr/>
+        </p:nvPicPr>
+        <p:blipFill rotWithShape="1">
+          <a:blip r:embed="rId2"/>
+          <a:srcRect l="50818" t="25930" r="1438" b="43096"/>
+          <a:stretch/>
+        </p:blipFill>
+        <p:spPr>
+          <a:xfrm>
+            <a:off x="6271326" y="2419517"/>
+            <a:ext cx="5820871" cy="1569855"/>
+          </a:xfrm>
+          <a:prstGeom prst="rect">
+            <a:avLst/>
+          </a:prstGeom>
+        </p:spPr>
+      </p:pic>
+      <p:pic>
+        <p:nvPicPr>
+          <p:cNvPr id="7" name="그림 6">
+            <a:extLst>
+              <a:ext uri="{FF2B5EF4-FFF2-40B4-BE49-F238E27FC236}">
+                <a16:creationId xmlns:a16="http://schemas.microsoft.com/office/drawing/2014/main" id="{A7ECD988-8F9D-4E7B-BD0E-BA8C519D42CC}"/>
+              </a:ext>
+            </a:extLst>
+          </p:cNvPr>
+          <p:cNvPicPr>
+            <a:picLocks noChangeAspect="1"/>
+          </p:cNvPicPr>
+          <p:nvPr/>
+        </p:nvPicPr>
+        <p:blipFill rotWithShape="1">
+          <a:blip r:embed="rId2"/>
+          <a:srcRect l="50886" t="14436" r="1370" b="73749"/>
+          <a:stretch/>
+        </p:blipFill>
+        <p:spPr>
+          <a:xfrm>
+            <a:off x="6271326" y="1480841"/>
+            <a:ext cx="5820871" cy="598811"/>
+          </a:xfrm>
+          <a:prstGeom prst="rect">
+            <a:avLst/>
+          </a:prstGeom>
+        </p:spPr>
+      </p:pic>
+      <p:pic>
+        <p:nvPicPr>
+          <p:cNvPr id="8" name="그림 7">
+            <a:extLst>
+              <a:ext uri="{FF2B5EF4-FFF2-40B4-BE49-F238E27FC236}">
+                <a16:creationId xmlns:a16="http://schemas.microsoft.com/office/drawing/2014/main" id="{1BC860AB-A048-42A3-AD86-9E11EBF2562C}"/>
+              </a:ext>
+            </a:extLst>
+          </p:cNvPr>
+          <p:cNvPicPr>
+            <a:picLocks noChangeAspect="1"/>
+          </p:cNvPicPr>
+          <p:nvPr/>
+        </p:nvPicPr>
+        <p:blipFill rotWithShape="1">
+          <a:blip r:embed="rId2"/>
+          <a:srcRect t="67762"/>
+          <a:stretch/>
+        </p:blipFill>
+        <p:spPr>
+          <a:xfrm>
+            <a:off x="0" y="3678509"/>
+            <a:ext cx="12192000" cy="1633912"/>
+          </a:xfrm>
+          <a:prstGeom prst="rect">
+            <a:avLst/>
+          </a:prstGeom>
+        </p:spPr>
+      </p:pic>
+      <p:pic>
+        <p:nvPicPr>
+          <p:cNvPr id="9" name="그림 8">
+            <a:extLst>
+              <a:ext uri="{FF2B5EF4-FFF2-40B4-BE49-F238E27FC236}">
+                <a16:creationId xmlns:a16="http://schemas.microsoft.com/office/drawing/2014/main" id="{75763405-3785-4209-8559-C1EB988DF39E}"/>
+              </a:ext>
+            </a:extLst>
+          </p:cNvPr>
+          <p:cNvPicPr>
+            <a:picLocks noChangeAspect="1"/>
+          </p:cNvPicPr>
+          <p:nvPr/>
+        </p:nvPicPr>
+        <p:blipFill rotWithShape="1">
+          <a:blip r:embed="rId2"/>
+          <a:srcRect t="14595" b="46288"/>
+          <a:stretch/>
+        </p:blipFill>
+        <p:spPr>
+          <a:xfrm>
+            <a:off x="0" y="1634591"/>
+            <a:ext cx="12192000" cy="1982549"/>
+          </a:xfrm>
+          <a:prstGeom prst="rect">
+            <a:avLst/>
+          </a:prstGeom>
+        </p:spPr>
+      </p:pic>
+    </p:spTree>
+    <p:extLst>
+      <p:ext uri="{BB962C8B-B14F-4D97-AF65-F5344CB8AC3E}">
+        <p14:creationId xmlns:p14="http://schemas.microsoft.com/office/powerpoint/2010/main" val="2892823444"/>
+      </p:ext>
+    </p:extLst>
+  </p:cSld>
+  <p:clrMapOvr>
+    <a:masterClrMapping/>
+  </p:clrMapOvr>
+</p:sld>
+</file>
+
+<file path=ppt/slides/slide9.xml><?xml version="1.0" encoding="utf-8"?>
+<p:sld xmlns:a="http://schemas.openxmlformats.org/drawingml/2006/main" xmlns:r="http://schemas.openxmlformats.org/officeDocument/2006/relationships" xmlns:p="http://schemas.openxmlformats.org/presentationml/2006/main">
+  <p:cSld>
+    <p:spTree>
+      <p:nvGrpSpPr>
+        <p:cNvPr id="1" name=""/>
+        <p:cNvGrpSpPr/>
+        <p:nvPr/>
+      </p:nvGrpSpPr>
+      <p:grpSpPr>
+        <a:xfrm>
+          <a:off x="0" y="0"/>
+          <a:ext cx="0" cy="0"/>
+          <a:chOff x="0" y="0"/>
+          <a:chExt cx="0" cy="0"/>
+        </a:xfrm>
+      </p:grpSpPr>
+      <p:pic>
+        <p:nvPicPr>
+          <p:cNvPr id="21" name="그림 20">
+            <a:extLst>
+              <a:ext uri="{FF2B5EF4-FFF2-40B4-BE49-F238E27FC236}">
+                <a16:creationId xmlns:a16="http://schemas.microsoft.com/office/drawing/2014/main" id="{5EEB83E3-3A5F-4B45-BCE1-6DCF0930A06F}"/>
+              </a:ext>
+            </a:extLst>
+          </p:cNvPr>
+          <p:cNvPicPr>
+            <a:picLocks noChangeAspect="1"/>
+          </p:cNvPicPr>
+          <p:nvPr/>
+        </p:nvPicPr>
+        <p:blipFill rotWithShape="1">
+          <a:blip r:embed="rId2"/>
+          <a:srcRect t="63594"/>
+          <a:stretch/>
+        </p:blipFill>
+        <p:spPr>
+          <a:xfrm>
+            <a:off x="164123" y="3212123"/>
+            <a:ext cx="11430000" cy="1476634"/>
+          </a:xfrm>
+          <a:prstGeom prst="rect">
+            <a:avLst/>
+          </a:prstGeom>
+        </p:spPr>
+      </p:pic>
+      <p:pic>
+        <p:nvPicPr>
+          <p:cNvPr id="22" name="그림 21">
+            <a:extLst>
+              <a:ext uri="{FF2B5EF4-FFF2-40B4-BE49-F238E27FC236}">
+                <a16:creationId xmlns:a16="http://schemas.microsoft.com/office/drawing/2014/main" id="{F666FC63-9D12-44AC-B0AE-644A01A8924D}"/>
+              </a:ext>
+            </a:extLst>
+          </p:cNvPr>
+          <p:cNvPicPr>
+            <a:picLocks noChangeAspect="1"/>
+          </p:cNvPicPr>
+          <p:nvPr/>
+        </p:nvPicPr>
+        <p:blipFill rotWithShape="1">
+          <a:blip r:embed="rId2"/>
+          <a:srcRect b="50858"/>
+          <a:stretch/>
+        </p:blipFill>
+        <p:spPr>
+          <a:xfrm>
+            <a:off x="164123" y="1218904"/>
+            <a:ext cx="11430000" cy="1993219"/>
+          </a:xfrm>
+          <a:prstGeom prst="rect">
+            <a:avLst/>
+          </a:prstGeom>
+        </p:spPr>
+      </p:pic>
+    </p:spTree>
+    <p:extLst>
+      <p:ext uri="{BB962C8B-B14F-4D97-AF65-F5344CB8AC3E}">
+        <p14:creationId xmlns:p14="http://schemas.microsoft.com/office/powerpoint/2010/main" val="4258123692"/>
       </p:ext>
     </p:extLst>
   </p:cSld>

--- a/프레젠테이션12.pptx
+++ b/프레젠테이션12.pptx
@@ -15,6 +15,10 @@
     <p:sldId id="262" r:id="rId9"/>
     <p:sldId id="263" r:id="rId10"/>
     <p:sldId id="265" r:id="rId11"/>
+    <p:sldId id="266" r:id="rId12"/>
+    <p:sldId id="267" r:id="rId13"/>
+    <p:sldId id="268" r:id="rId14"/>
+    <p:sldId id="269" r:id="rId15"/>
   </p:sldIdLst>
   <p:sldSz cx="12192000" cy="6858000"/>
   <p:notesSz cx="6858000" cy="9144000"/>
@@ -268,7 +272,7 @@
           <a:p>
             <a:fld id="{A9B323CC-91F9-4676-9123-0A1E04F7520C}" type="datetimeFigureOut">
               <a:rPr lang="ko-KR" altLang="en-US" smtClean="0"/>
-              <a:t>2026-06-20</a:t>
+              <a:t>2026-06-22</a:t>
             </a:fld>
             <a:endParaRPr lang="ko-KR" altLang="en-US"/>
           </a:p>
@@ -466,7 +470,7 @@
           <a:p>
             <a:fld id="{A9B323CC-91F9-4676-9123-0A1E04F7520C}" type="datetimeFigureOut">
               <a:rPr lang="ko-KR" altLang="en-US" smtClean="0"/>
-              <a:t>2026-06-20</a:t>
+              <a:t>2026-06-22</a:t>
             </a:fld>
             <a:endParaRPr lang="ko-KR" altLang="en-US"/>
           </a:p>
@@ -674,7 +678,7 @@
           <a:p>
             <a:fld id="{A9B323CC-91F9-4676-9123-0A1E04F7520C}" type="datetimeFigureOut">
               <a:rPr lang="ko-KR" altLang="en-US" smtClean="0"/>
-              <a:t>2026-06-20</a:t>
+              <a:t>2026-06-22</a:t>
             </a:fld>
             <a:endParaRPr lang="ko-KR" altLang="en-US"/>
           </a:p>
@@ -872,7 +876,7 @@
           <a:p>
             <a:fld id="{A9B323CC-91F9-4676-9123-0A1E04F7520C}" type="datetimeFigureOut">
               <a:rPr lang="ko-KR" altLang="en-US" smtClean="0"/>
-              <a:t>2026-06-20</a:t>
+              <a:t>2026-06-22</a:t>
             </a:fld>
             <a:endParaRPr lang="ko-KR" altLang="en-US"/>
           </a:p>
@@ -1147,7 +1151,7 @@
           <a:p>
             <a:fld id="{A9B323CC-91F9-4676-9123-0A1E04F7520C}" type="datetimeFigureOut">
               <a:rPr lang="ko-KR" altLang="en-US" smtClean="0"/>
-              <a:t>2026-06-20</a:t>
+              <a:t>2026-06-22</a:t>
             </a:fld>
             <a:endParaRPr lang="ko-KR" altLang="en-US"/>
           </a:p>
@@ -1412,7 +1416,7 @@
           <a:p>
             <a:fld id="{A9B323CC-91F9-4676-9123-0A1E04F7520C}" type="datetimeFigureOut">
               <a:rPr lang="ko-KR" altLang="en-US" smtClean="0"/>
-              <a:t>2026-06-20</a:t>
+              <a:t>2026-06-22</a:t>
             </a:fld>
             <a:endParaRPr lang="ko-KR" altLang="en-US"/>
           </a:p>
@@ -1824,7 +1828,7 @@
           <a:p>
             <a:fld id="{A9B323CC-91F9-4676-9123-0A1E04F7520C}" type="datetimeFigureOut">
               <a:rPr lang="ko-KR" altLang="en-US" smtClean="0"/>
-              <a:t>2026-06-20</a:t>
+              <a:t>2026-06-22</a:t>
             </a:fld>
             <a:endParaRPr lang="ko-KR" altLang="en-US"/>
           </a:p>
@@ -1965,7 +1969,7 @@
           <a:p>
             <a:fld id="{A9B323CC-91F9-4676-9123-0A1E04F7520C}" type="datetimeFigureOut">
               <a:rPr lang="ko-KR" altLang="en-US" smtClean="0"/>
-              <a:t>2026-06-20</a:t>
+              <a:t>2026-06-22</a:t>
             </a:fld>
             <a:endParaRPr lang="ko-KR" altLang="en-US"/>
           </a:p>
@@ -2078,7 +2082,7 @@
           <a:p>
             <a:fld id="{A9B323CC-91F9-4676-9123-0A1E04F7520C}" type="datetimeFigureOut">
               <a:rPr lang="ko-KR" altLang="en-US" smtClean="0"/>
-              <a:t>2026-06-20</a:t>
+              <a:t>2026-06-22</a:t>
             </a:fld>
             <a:endParaRPr lang="ko-KR" altLang="en-US"/>
           </a:p>
@@ -2389,7 +2393,7 @@
           <a:p>
             <a:fld id="{A9B323CC-91F9-4676-9123-0A1E04F7520C}" type="datetimeFigureOut">
               <a:rPr lang="ko-KR" altLang="en-US" smtClean="0"/>
-              <a:t>2026-06-20</a:t>
+              <a:t>2026-06-22</a:t>
             </a:fld>
             <a:endParaRPr lang="ko-KR" altLang="en-US"/>
           </a:p>
@@ -2677,7 +2681,7 @@
           <a:p>
             <a:fld id="{A9B323CC-91F9-4676-9123-0A1E04F7520C}" type="datetimeFigureOut">
               <a:rPr lang="ko-KR" altLang="en-US" smtClean="0"/>
-              <a:t>2026-06-20</a:t>
+              <a:t>2026-06-22</a:t>
             </a:fld>
             <a:endParaRPr lang="ko-KR" altLang="en-US"/>
           </a:p>
@@ -2918,7 +2922,7 @@
           <a:p>
             <a:fld id="{A9B323CC-91F9-4676-9123-0A1E04F7520C}" type="datetimeFigureOut">
               <a:rPr lang="ko-KR" altLang="en-US" smtClean="0"/>
-              <a:t>2026-06-20</a:t>
+              <a:t>2026-06-22</a:t>
             </a:fld>
             <a:endParaRPr lang="ko-KR" altLang="en-US"/>
           </a:p>
@@ -3808,6 +3812,670 @@
     <p:extLst>
       <p:ext uri="{BB962C8B-B14F-4D97-AF65-F5344CB8AC3E}">
         <p14:creationId xmlns:p14="http://schemas.microsoft.com/office/powerpoint/2010/main" val="1757875038"/>
+      </p:ext>
+    </p:extLst>
+  </p:cSld>
+  <p:clrMapOvr>
+    <a:masterClrMapping/>
+  </p:clrMapOvr>
+</p:sld>
+</file>
+
+<file path=ppt/slides/slide11.xml><?xml version="1.0" encoding="utf-8"?>
+<p:sld xmlns:a="http://schemas.openxmlformats.org/drawingml/2006/main" xmlns:r="http://schemas.openxmlformats.org/officeDocument/2006/relationships" xmlns:p="http://schemas.openxmlformats.org/presentationml/2006/main">
+  <p:cSld>
+    <p:spTree>
+      <p:nvGrpSpPr>
+        <p:cNvPr id="1" name=""/>
+        <p:cNvGrpSpPr/>
+        <p:nvPr/>
+      </p:nvGrpSpPr>
+      <p:grpSpPr>
+        <a:xfrm>
+          <a:off x="0" y="0"/>
+          <a:ext cx="0" cy="0"/>
+          <a:chOff x="0" y="0"/>
+          <a:chExt cx="0" cy="0"/>
+        </a:xfrm>
+      </p:grpSpPr>
+      <p:pic>
+        <p:nvPicPr>
+          <p:cNvPr id="12" name="그림 11">
+            <a:extLst>
+              <a:ext uri="{FF2B5EF4-FFF2-40B4-BE49-F238E27FC236}">
+                <a16:creationId xmlns:a16="http://schemas.microsoft.com/office/drawing/2014/main" id="{3254979F-112D-4957-AB94-43BDB8610BE0}"/>
+              </a:ext>
+            </a:extLst>
+          </p:cNvPr>
+          <p:cNvPicPr>
+            <a:picLocks noChangeAspect="1"/>
+          </p:cNvPicPr>
+          <p:nvPr/>
+        </p:nvPicPr>
+        <p:blipFill rotWithShape="1">
+          <a:blip r:embed="rId2">
+            <a:extLst>
+              <a:ext uri="{28A0092B-C50C-407E-A947-70E740481C1C}">
+                <a14:useLocalDpi xmlns:a14="http://schemas.microsoft.com/office/drawing/2010/main" val="0"/>
+              </a:ext>
+            </a:extLst>
+          </a:blip>
+          <a:srcRect t="44010" b="9381"/>
+          <a:stretch/>
+        </p:blipFill>
+        <p:spPr>
+          <a:xfrm>
+            <a:off x="1381125" y="3018329"/>
+            <a:ext cx="9429750" cy="3196354"/>
+          </a:xfrm>
+          <a:prstGeom prst="rect">
+            <a:avLst/>
+          </a:prstGeom>
+        </p:spPr>
+      </p:pic>
+      <p:pic>
+        <p:nvPicPr>
+          <p:cNvPr id="13" name="그림 12">
+            <a:extLst>
+              <a:ext uri="{FF2B5EF4-FFF2-40B4-BE49-F238E27FC236}">
+                <a16:creationId xmlns:a16="http://schemas.microsoft.com/office/drawing/2014/main" id="{F283D57B-BE80-413C-B01C-5BD4F5631868}"/>
+              </a:ext>
+            </a:extLst>
+          </p:cNvPr>
+          <p:cNvPicPr>
+            <a:picLocks noChangeAspect="1"/>
+          </p:cNvPicPr>
+          <p:nvPr/>
+        </p:nvPicPr>
+        <p:blipFill rotWithShape="1">
+          <a:blip r:embed="rId2">
+            <a:extLst>
+              <a:ext uri="{28A0092B-C50C-407E-A947-70E740481C1C}">
+                <a14:useLocalDpi xmlns:a14="http://schemas.microsoft.com/office/drawing/2010/main" val="0"/>
+              </a:ext>
+            </a:extLst>
+          </a:blip>
+          <a:srcRect l="71611" t="10521" r="3332" b="82635"/>
+          <a:stretch/>
+        </p:blipFill>
+        <p:spPr>
+          <a:xfrm>
+            <a:off x="5033246" y="3552401"/>
+            <a:ext cx="2362876" cy="469338"/>
+          </a:xfrm>
+          <a:prstGeom prst="rect">
+            <a:avLst/>
+          </a:prstGeom>
+        </p:spPr>
+      </p:pic>
+      <p:pic>
+        <p:nvPicPr>
+          <p:cNvPr id="14" name="그림 13">
+            <a:extLst>
+              <a:ext uri="{FF2B5EF4-FFF2-40B4-BE49-F238E27FC236}">
+                <a16:creationId xmlns:a16="http://schemas.microsoft.com/office/drawing/2014/main" id="{89FD2407-09F7-4E82-9CCF-20E005497327}"/>
+              </a:ext>
+            </a:extLst>
+          </p:cNvPr>
+          <p:cNvPicPr>
+            <a:picLocks noChangeAspect="1"/>
+          </p:cNvPicPr>
+          <p:nvPr/>
+        </p:nvPicPr>
+        <p:blipFill rotWithShape="1">
+          <a:blip r:embed="rId2">
+            <a:extLst>
+              <a:ext uri="{28A0092B-C50C-407E-A947-70E740481C1C}">
+                <a14:useLocalDpi xmlns:a14="http://schemas.microsoft.com/office/drawing/2010/main" val="0"/>
+              </a:ext>
+            </a:extLst>
+          </a:blip>
+          <a:srcRect t="19114" r="95940" b="39351"/>
+          <a:stretch/>
+        </p:blipFill>
+        <p:spPr>
+          <a:xfrm>
+            <a:off x="1389217" y="2362874"/>
+            <a:ext cx="382939" cy="2848393"/>
+          </a:xfrm>
+          <a:prstGeom prst="rect">
+            <a:avLst/>
+          </a:prstGeom>
+        </p:spPr>
+      </p:pic>
+      <p:pic>
+        <p:nvPicPr>
+          <p:cNvPr id="6" name="그림 5">
+            <a:extLst>
+              <a:ext uri="{FF2B5EF4-FFF2-40B4-BE49-F238E27FC236}">
+                <a16:creationId xmlns:a16="http://schemas.microsoft.com/office/drawing/2014/main" id="{80BD0300-7EF7-460A-96F1-0DF3D52C1DE8}"/>
+              </a:ext>
+            </a:extLst>
+          </p:cNvPr>
+          <p:cNvPicPr>
+            <a:picLocks noChangeAspect="1"/>
+          </p:cNvPicPr>
+          <p:nvPr/>
+        </p:nvPicPr>
+        <p:blipFill rotWithShape="1">
+          <a:blip r:embed="rId3"/>
+          <a:srcRect t="89846" b="4751"/>
+          <a:stretch/>
+        </p:blipFill>
+        <p:spPr>
+          <a:xfrm>
+            <a:off x="1580686" y="6093302"/>
+            <a:ext cx="9425233" cy="242761"/>
+          </a:xfrm>
+          <a:prstGeom prst="rect">
+            <a:avLst/>
+          </a:prstGeom>
+        </p:spPr>
+      </p:pic>
+    </p:spTree>
+    <p:extLst>
+      <p:ext uri="{BB962C8B-B14F-4D97-AF65-F5344CB8AC3E}">
+        <p14:creationId xmlns:p14="http://schemas.microsoft.com/office/powerpoint/2010/main" val="1507408289"/>
+      </p:ext>
+    </p:extLst>
+  </p:cSld>
+  <p:clrMapOvr>
+    <a:masterClrMapping/>
+  </p:clrMapOvr>
+</p:sld>
+</file>
+
+<file path=ppt/slides/slide12.xml><?xml version="1.0" encoding="utf-8"?>
+<p:sld xmlns:a="http://schemas.openxmlformats.org/drawingml/2006/main" xmlns:r="http://schemas.openxmlformats.org/officeDocument/2006/relationships" xmlns:p="http://schemas.openxmlformats.org/presentationml/2006/main">
+  <p:cSld>
+    <p:spTree>
+      <p:nvGrpSpPr>
+        <p:cNvPr id="1" name=""/>
+        <p:cNvGrpSpPr/>
+        <p:nvPr/>
+      </p:nvGrpSpPr>
+      <p:grpSpPr>
+        <a:xfrm>
+          <a:off x="0" y="0"/>
+          <a:ext cx="0" cy="0"/>
+          <a:chOff x="0" y="0"/>
+          <a:chExt cx="0" cy="0"/>
+        </a:xfrm>
+      </p:grpSpPr>
+      <p:pic>
+        <p:nvPicPr>
+          <p:cNvPr id="6" name="그림 5">
+            <a:extLst>
+              <a:ext uri="{FF2B5EF4-FFF2-40B4-BE49-F238E27FC236}">
+                <a16:creationId xmlns:a16="http://schemas.microsoft.com/office/drawing/2014/main" id="{B24697B8-3DDA-4A24-984A-0ED6B4D35073}"/>
+              </a:ext>
+            </a:extLst>
+          </p:cNvPr>
+          <p:cNvPicPr>
+            <a:picLocks noChangeAspect="1"/>
+          </p:cNvPicPr>
+          <p:nvPr/>
+        </p:nvPicPr>
+        <p:blipFill rotWithShape="1">
+          <a:blip r:embed="rId2">
+            <a:extLst>
+              <a:ext uri="{28A0092B-C50C-407E-A947-70E740481C1C}">
+                <a14:useLocalDpi xmlns:a14="http://schemas.microsoft.com/office/drawing/2010/main" val="0"/>
+              </a:ext>
+            </a:extLst>
+          </a:blip>
+          <a:srcRect l="22202" t="12912" b="11470"/>
+          <a:stretch/>
+        </p:blipFill>
+        <p:spPr>
+          <a:xfrm>
+            <a:off x="3293457" y="1658868"/>
+            <a:ext cx="7843517" cy="3609048"/>
+          </a:xfrm>
+          <a:prstGeom prst="rect">
+            <a:avLst/>
+          </a:prstGeom>
+        </p:spPr>
+      </p:pic>
+      <p:pic>
+        <p:nvPicPr>
+          <p:cNvPr id="7" name="그림 6">
+            <a:extLst>
+              <a:ext uri="{FF2B5EF4-FFF2-40B4-BE49-F238E27FC236}">
+                <a16:creationId xmlns:a16="http://schemas.microsoft.com/office/drawing/2014/main" id="{9723825D-DE72-4362-96FD-A537EB35A1E1}"/>
+              </a:ext>
+            </a:extLst>
+          </p:cNvPr>
+          <p:cNvPicPr>
+            <a:picLocks noChangeAspect="1"/>
+          </p:cNvPicPr>
+          <p:nvPr/>
+        </p:nvPicPr>
+        <p:blipFill rotWithShape="1">
+          <a:blip r:embed="rId2">
+            <a:extLst>
+              <a:ext uri="{28A0092B-C50C-407E-A947-70E740481C1C}">
+                <a14:useLocalDpi xmlns:a14="http://schemas.microsoft.com/office/drawing/2010/main" val="0"/>
+              </a:ext>
+            </a:extLst>
+          </a:blip>
+          <a:srcRect r="58040" b="94011"/>
+          <a:stretch/>
+        </p:blipFill>
+        <p:spPr>
+          <a:xfrm>
+            <a:off x="4767921" y="1373039"/>
+            <a:ext cx="4230422" cy="285829"/>
+          </a:xfrm>
+          <a:prstGeom prst="rect">
+            <a:avLst/>
+          </a:prstGeom>
+        </p:spPr>
+      </p:pic>
+      <p:pic>
+        <p:nvPicPr>
+          <p:cNvPr id="10" name="그림 9">
+            <a:extLst>
+              <a:ext uri="{FF2B5EF4-FFF2-40B4-BE49-F238E27FC236}">
+                <a16:creationId xmlns:a16="http://schemas.microsoft.com/office/drawing/2014/main" id="{232E9CD8-6211-4551-8C73-47A12E707B7C}"/>
+              </a:ext>
+            </a:extLst>
+          </p:cNvPr>
+          <p:cNvPicPr>
+            <a:picLocks noChangeAspect="1"/>
+          </p:cNvPicPr>
+          <p:nvPr/>
+        </p:nvPicPr>
+        <p:blipFill rotWithShape="1">
+          <a:blip r:embed="rId3">
+            <a:extLst>
+              <a:ext uri="{28A0092B-C50C-407E-A947-70E740481C1C}">
+                <a14:useLocalDpi xmlns:a14="http://schemas.microsoft.com/office/drawing/2010/main" val="0"/>
+              </a:ext>
+            </a:extLst>
+          </a:blip>
+          <a:srcRect l="20196" t="94407"/>
+          <a:stretch/>
+        </p:blipFill>
+        <p:spPr>
+          <a:xfrm>
+            <a:off x="3576679" y="5348836"/>
+            <a:ext cx="8045817" cy="266946"/>
+          </a:xfrm>
+          <a:prstGeom prst="rect">
+            <a:avLst/>
+          </a:prstGeom>
+        </p:spPr>
+      </p:pic>
+      <p:pic>
+        <p:nvPicPr>
+          <p:cNvPr id="14" name="그림 13">
+            <a:extLst>
+              <a:ext uri="{FF2B5EF4-FFF2-40B4-BE49-F238E27FC236}">
+                <a16:creationId xmlns:a16="http://schemas.microsoft.com/office/drawing/2014/main" id="{3CC9033F-9A55-476C-99D3-CA4CB58EA8BB}"/>
+              </a:ext>
+            </a:extLst>
+          </p:cNvPr>
+          <p:cNvPicPr>
+            <a:picLocks noChangeAspect="1"/>
+          </p:cNvPicPr>
+          <p:nvPr/>
+        </p:nvPicPr>
+        <p:blipFill rotWithShape="1">
+          <a:blip r:embed="rId4">
+            <a:extLst>
+              <a:ext uri="{28A0092B-C50C-407E-A947-70E740481C1C}">
+                <a14:useLocalDpi xmlns:a14="http://schemas.microsoft.com/office/drawing/2010/main" val="0"/>
+              </a:ext>
+            </a:extLst>
+          </a:blip>
+          <a:srcRect l="22202" t="14607" r="746" b="11470"/>
+          <a:stretch/>
+        </p:blipFill>
+        <p:spPr>
+          <a:xfrm>
+            <a:off x="3293457" y="1739788"/>
+            <a:ext cx="7768355" cy="3528128"/>
+          </a:xfrm>
+          <a:prstGeom prst="rect">
+            <a:avLst/>
+          </a:prstGeom>
+        </p:spPr>
+      </p:pic>
+      <p:pic>
+        <p:nvPicPr>
+          <p:cNvPr id="17" name="그림 16">
+            <a:extLst>
+              <a:ext uri="{FF2B5EF4-FFF2-40B4-BE49-F238E27FC236}">
+                <a16:creationId xmlns:a16="http://schemas.microsoft.com/office/drawing/2014/main" id="{4E4481B9-05EF-41A6-ADB3-CADA6668F9BC}"/>
+              </a:ext>
+            </a:extLst>
+          </p:cNvPr>
+          <p:cNvPicPr>
+            <a:picLocks noChangeAspect="1"/>
+          </p:cNvPicPr>
+          <p:nvPr/>
+        </p:nvPicPr>
+        <p:blipFill rotWithShape="1">
+          <a:blip r:embed="rId5">
+            <a:extLst>
+              <a:ext uri="{28A0092B-C50C-407E-A947-70E740481C1C}">
+                <a14:useLocalDpi xmlns:a14="http://schemas.microsoft.com/office/drawing/2010/main" val="0"/>
+              </a:ext>
+            </a:extLst>
+          </a:blip>
+          <a:srcRect l="22202" t="14607" b="16726"/>
+          <a:stretch/>
+        </p:blipFill>
+        <p:spPr>
+          <a:xfrm>
+            <a:off x="3293457" y="1739788"/>
+            <a:ext cx="7843518" cy="3277274"/>
+          </a:xfrm>
+          <a:prstGeom prst="rect">
+            <a:avLst/>
+          </a:prstGeom>
+        </p:spPr>
+      </p:pic>
+    </p:spTree>
+    <p:extLst>
+      <p:ext uri="{BB962C8B-B14F-4D97-AF65-F5344CB8AC3E}">
+        <p14:creationId xmlns:p14="http://schemas.microsoft.com/office/powerpoint/2010/main" val="3975730286"/>
+      </p:ext>
+    </p:extLst>
+  </p:cSld>
+  <p:clrMapOvr>
+    <a:masterClrMapping/>
+  </p:clrMapOvr>
+</p:sld>
+</file>
+
+<file path=ppt/slides/slide13.xml><?xml version="1.0" encoding="utf-8"?>
+<p:sld xmlns:a="http://schemas.openxmlformats.org/drawingml/2006/main" xmlns:r="http://schemas.openxmlformats.org/officeDocument/2006/relationships" xmlns:p="http://schemas.openxmlformats.org/presentationml/2006/main">
+  <p:cSld>
+    <p:spTree>
+      <p:nvGrpSpPr>
+        <p:cNvPr id="1" name=""/>
+        <p:cNvGrpSpPr/>
+        <p:nvPr/>
+      </p:nvGrpSpPr>
+      <p:grpSpPr>
+        <a:xfrm>
+          <a:off x="0" y="0"/>
+          <a:ext cx="0" cy="0"/>
+          <a:chOff x="0" y="0"/>
+          <a:chExt cx="0" cy="0"/>
+        </a:xfrm>
+      </p:grpSpPr>
+      <p:pic>
+        <p:nvPicPr>
+          <p:cNvPr id="11" name="그림 10">
+            <a:extLst>
+              <a:ext uri="{FF2B5EF4-FFF2-40B4-BE49-F238E27FC236}">
+                <a16:creationId xmlns:a16="http://schemas.microsoft.com/office/drawing/2014/main" id="{834CB8BB-1126-44C8-97CE-84DD0B89C419}"/>
+              </a:ext>
+            </a:extLst>
+          </p:cNvPr>
+          <p:cNvPicPr>
+            <a:picLocks noChangeAspect="1"/>
+          </p:cNvPicPr>
+          <p:nvPr/>
+        </p:nvPicPr>
+        <p:blipFill>
+          <a:blip r:embed="rId2">
+            <a:extLst>
+              <a:ext uri="{28A0092B-C50C-407E-A947-70E740481C1C}">
+                <a14:useLocalDpi xmlns:a14="http://schemas.microsoft.com/office/drawing/2010/main" val="0"/>
+              </a:ext>
+            </a:extLst>
+          </a:blip>
+          <a:stretch>
+            <a:fillRect/>
+          </a:stretch>
+        </p:blipFill>
+        <p:spPr>
+          <a:xfrm>
+            <a:off x="6341788" y="1968169"/>
+            <a:ext cx="4582022" cy="3109229"/>
+          </a:xfrm>
+          <a:prstGeom prst="rect">
+            <a:avLst/>
+          </a:prstGeom>
+        </p:spPr>
+      </p:pic>
+      <p:pic>
+        <p:nvPicPr>
+          <p:cNvPr id="15" name="그림 14">
+            <a:extLst>
+              <a:ext uri="{FF2B5EF4-FFF2-40B4-BE49-F238E27FC236}">
+                <a16:creationId xmlns:a16="http://schemas.microsoft.com/office/drawing/2014/main" id="{302C6D47-C646-4FA3-AD2C-CBDE9CBCE881}"/>
+              </a:ext>
+            </a:extLst>
+          </p:cNvPr>
+          <p:cNvPicPr>
+            <a:picLocks noChangeAspect="1"/>
+          </p:cNvPicPr>
+          <p:nvPr/>
+        </p:nvPicPr>
+        <p:blipFill rotWithShape="1">
+          <a:blip r:embed="rId3">
+            <a:extLst>
+              <a:ext uri="{28A0092B-C50C-407E-A947-70E740481C1C}">
+                <a14:useLocalDpi xmlns:a14="http://schemas.microsoft.com/office/drawing/2010/main" val="0"/>
+              </a:ext>
+            </a:extLst>
+          </a:blip>
+          <a:srcRect r="5950"/>
+          <a:stretch/>
+        </p:blipFill>
+        <p:spPr>
+          <a:xfrm>
+            <a:off x="-1644607" y="1874385"/>
+            <a:ext cx="7740607" cy="3109229"/>
+          </a:xfrm>
+          <a:prstGeom prst="rect">
+            <a:avLst/>
+          </a:prstGeom>
+        </p:spPr>
+      </p:pic>
+      <p:pic>
+        <p:nvPicPr>
+          <p:cNvPr id="16" name="그림 15">
+            <a:extLst>
+              <a:ext uri="{FF2B5EF4-FFF2-40B4-BE49-F238E27FC236}">
+                <a16:creationId xmlns:a16="http://schemas.microsoft.com/office/drawing/2014/main" id="{B99236D6-01F5-4D7D-862A-D7D8061019DA}"/>
+              </a:ext>
+            </a:extLst>
+          </p:cNvPr>
+          <p:cNvPicPr>
+            <a:picLocks noChangeAspect="1"/>
+          </p:cNvPicPr>
+          <p:nvPr/>
+        </p:nvPicPr>
+        <p:blipFill rotWithShape="1">
+          <a:blip r:embed="rId3">
+            <a:extLst>
+              <a:ext uri="{28A0092B-C50C-407E-A947-70E740481C1C}">
+                <a14:useLocalDpi xmlns:a14="http://schemas.microsoft.com/office/drawing/2010/main" val="0"/>
+              </a:ext>
+            </a:extLst>
+          </a:blip>
+          <a:srcRect l="82614" b="76164"/>
+          <a:stretch/>
+        </p:blipFill>
+        <p:spPr>
+          <a:xfrm>
+            <a:off x="4665121" y="1812601"/>
+            <a:ext cx="1430879" cy="741129"/>
+          </a:xfrm>
+          <a:prstGeom prst="rect">
+            <a:avLst/>
+          </a:prstGeom>
+        </p:spPr>
+      </p:pic>
+    </p:spTree>
+    <p:extLst>
+      <p:ext uri="{BB962C8B-B14F-4D97-AF65-F5344CB8AC3E}">
+        <p14:creationId xmlns:p14="http://schemas.microsoft.com/office/powerpoint/2010/main" val="1128474037"/>
+      </p:ext>
+    </p:extLst>
+  </p:cSld>
+  <p:clrMapOvr>
+    <a:masterClrMapping/>
+  </p:clrMapOvr>
+</p:sld>
+</file>
+
+<file path=ppt/slides/slide14.xml><?xml version="1.0" encoding="utf-8"?>
+<p:sld xmlns:a="http://schemas.openxmlformats.org/drawingml/2006/main" xmlns:r="http://schemas.openxmlformats.org/officeDocument/2006/relationships" xmlns:p="http://schemas.openxmlformats.org/presentationml/2006/main">
+  <p:cSld>
+    <p:spTree>
+      <p:nvGrpSpPr>
+        <p:cNvPr id="1" name=""/>
+        <p:cNvGrpSpPr/>
+        <p:nvPr/>
+      </p:nvGrpSpPr>
+      <p:grpSpPr>
+        <a:xfrm>
+          <a:off x="0" y="0"/>
+          <a:ext cx="0" cy="0"/>
+          <a:chOff x="0" y="0"/>
+          <a:chExt cx="0" cy="0"/>
+        </a:xfrm>
+      </p:grpSpPr>
+      <p:pic>
+        <p:nvPicPr>
+          <p:cNvPr id="26" name="그림 25">
+            <a:extLst>
+              <a:ext uri="{FF2B5EF4-FFF2-40B4-BE49-F238E27FC236}">
+                <a16:creationId xmlns:a16="http://schemas.microsoft.com/office/drawing/2014/main" id="{ED8BCE5A-5EEC-4AD3-A914-5F786DE7B96F}"/>
+              </a:ext>
+            </a:extLst>
+          </p:cNvPr>
+          <p:cNvPicPr>
+            <a:picLocks noChangeAspect="1"/>
+          </p:cNvPicPr>
+          <p:nvPr/>
+        </p:nvPicPr>
+        <p:blipFill rotWithShape="1">
+          <a:blip r:embed="rId2">
+            <a:extLst>
+              <a:ext uri="{28A0092B-C50C-407E-A947-70E740481C1C}">
+                <a14:useLocalDpi xmlns:a14="http://schemas.microsoft.com/office/drawing/2010/main" val="0"/>
+              </a:ext>
+            </a:extLst>
+          </a:blip>
+          <a:srcRect r="5028" b="8501"/>
+          <a:stretch/>
+        </p:blipFill>
+        <p:spPr>
+          <a:xfrm>
+            <a:off x="6773174" y="2969610"/>
+            <a:ext cx="4384562" cy="3035724"/>
+          </a:xfrm>
+          <a:prstGeom prst="rect">
+            <a:avLst/>
+          </a:prstGeom>
+        </p:spPr>
+      </p:pic>
+      <p:pic>
+        <p:nvPicPr>
+          <p:cNvPr id="20" name="그림 19">
+            <a:extLst>
+              <a:ext uri="{FF2B5EF4-FFF2-40B4-BE49-F238E27FC236}">
+                <a16:creationId xmlns:a16="http://schemas.microsoft.com/office/drawing/2014/main" id="{19281790-4C1D-4B7A-BF50-BF4D1176B363}"/>
+              </a:ext>
+            </a:extLst>
+          </p:cNvPr>
+          <p:cNvPicPr>
+            <a:picLocks noChangeAspect="1"/>
+          </p:cNvPicPr>
+          <p:nvPr/>
+        </p:nvPicPr>
+        <p:blipFill>
+          <a:blip r:embed="rId3">
+            <a:extLst>
+              <a:ext uri="{28A0092B-C50C-407E-A947-70E740481C1C}">
+                <a14:useLocalDpi xmlns:a14="http://schemas.microsoft.com/office/drawing/2010/main" val="0"/>
+              </a:ext>
+            </a:extLst>
+          </a:blip>
+          <a:stretch>
+            <a:fillRect/>
+          </a:stretch>
+        </p:blipFill>
+        <p:spPr>
+          <a:xfrm>
+            <a:off x="1366468" y="2988064"/>
+            <a:ext cx="5406705" cy="3017270"/>
+          </a:xfrm>
+          <a:prstGeom prst="rect">
+            <a:avLst/>
+          </a:prstGeom>
+        </p:spPr>
+      </p:pic>
+      <p:pic>
+        <p:nvPicPr>
+          <p:cNvPr id="17" name="그림 16">
+            <a:extLst>
+              <a:ext uri="{FF2B5EF4-FFF2-40B4-BE49-F238E27FC236}">
+                <a16:creationId xmlns:a16="http://schemas.microsoft.com/office/drawing/2014/main" id="{1CD43CF7-DEF9-40D9-9534-4D0154BDC1BB}"/>
+              </a:ext>
+            </a:extLst>
+          </p:cNvPr>
+          <p:cNvPicPr>
+            <a:picLocks noChangeAspect="1"/>
+          </p:cNvPicPr>
+          <p:nvPr/>
+        </p:nvPicPr>
+        <p:blipFill rotWithShape="1">
+          <a:blip r:embed="rId4"/>
+          <a:srcRect t="1" b="28054"/>
+          <a:stretch/>
+        </p:blipFill>
+        <p:spPr>
+          <a:xfrm>
+            <a:off x="1778035" y="3162786"/>
+            <a:ext cx="453362" cy="143738"/>
+          </a:xfrm>
+          <a:prstGeom prst="rect">
+            <a:avLst/>
+          </a:prstGeom>
+        </p:spPr>
+      </p:pic>
+      <p:pic>
+        <p:nvPicPr>
+          <p:cNvPr id="23" name="그림 22">
+            <a:extLst>
+              <a:ext uri="{FF2B5EF4-FFF2-40B4-BE49-F238E27FC236}">
+                <a16:creationId xmlns:a16="http://schemas.microsoft.com/office/drawing/2014/main" id="{FA4F7029-CF40-4D81-93BA-B7DE32F4850F}"/>
+              </a:ext>
+            </a:extLst>
+          </p:cNvPr>
+          <p:cNvPicPr>
+            <a:picLocks noChangeAspect="1"/>
+          </p:cNvPicPr>
+          <p:nvPr/>
+        </p:nvPicPr>
+        <p:blipFill rotWithShape="1">
+          <a:blip r:embed="rId4"/>
+          <a:srcRect t="1" b="28054"/>
+          <a:stretch/>
+        </p:blipFill>
+        <p:spPr>
+          <a:xfrm>
+            <a:off x="7184740" y="3058165"/>
+            <a:ext cx="453362" cy="143738"/>
+          </a:xfrm>
+          <a:prstGeom prst="rect">
+            <a:avLst/>
+          </a:prstGeom>
+        </p:spPr>
+      </p:pic>
+    </p:spTree>
+    <p:extLst>
+      <p:ext uri="{BB962C8B-B14F-4D97-AF65-F5344CB8AC3E}">
+        <p14:creationId xmlns:p14="http://schemas.microsoft.com/office/powerpoint/2010/main" val="3929263067"/>
       </p:ext>
     </p:extLst>
   </p:cSld>

--- a/프레젠테이션12.pptx
+++ b/프레젠테이션12.pptx
@@ -19,6 +19,9 @@
     <p:sldId id="267" r:id="rId13"/>
     <p:sldId id="268" r:id="rId14"/>
     <p:sldId id="269" r:id="rId15"/>
+    <p:sldId id="270" r:id="rId16"/>
+    <p:sldId id="271" r:id="rId17"/>
+    <p:sldId id="272" r:id="rId18"/>
   </p:sldIdLst>
   <p:sldSz cx="12192000" cy="6858000"/>
   <p:notesSz cx="6858000" cy="9144000"/>
@@ -4476,6 +4479,400 @@
     <p:extLst>
       <p:ext uri="{BB962C8B-B14F-4D97-AF65-F5344CB8AC3E}">
         <p14:creationId xmlns:p14="http://schemas.microsoft.com/office/powerpoint/2010/main" val="3929263067"/>
+      </p:ext>
+    </p:extLst>
+  </p:cSld>
+  <p:clrMapOvr>
+    <a:masterClrMapping/>
+  </p:clrMapOvr>
+</p:sld>
+</file>
+
+<file path=ppt/slides/slide15.xml><?xml version="1.0" encoding="utf-8"?>
+<p:sld xmlns:a="http://schemas.openxmlformats.org/drawingml/2006/main" xmlns:r="http://schemas.openxmlformats.org/officeDocument/2006/relationships" xmlns:p="http://schemas.openxmlformats.org/presentationml/2006/main">
+  <p:cSld>
+    <p:spTree>
+      <p:nvGrpSpPr>
+        <p:cNvPr id="1" name=""/>
+        <p:cNvGrpSpPr/>
+        <p:nvPr/>
+      </p:nvGrpSpPr>
+      <p:grpSpPr>
+        <a:xfrm>
+          <a:off x="0" y="0"/>
+          <a:ext cx="0" cy="0"/>
+          <a:chOff x="0" y="0"/>
+          <a:chExt cx="0" cy="0"/>
+        </a:xfrm>
+      </p:grpSpPr>
+      <p:pic>
+        <p:nvPicPr>
+          <p:cNvPr id="5" name="그림 4">
+            <a:extLst>
+              <a:ext uri="{FF2B5EF4-FFF2-40B4-BE49-F238E27FC236}">
+                <a16:creationId xmlns:a16="http://schemas.microsoft.com/office/drawing/2014/main" id="{E608DFCB-6B54-4949-B589-888F32A74343}"/>
+              </a:ext>
+            </a:extLst>
+          </p:cNvPr>
+          <p:cNvPicPr>
+            <a:picLocks noChangeAspect="1"/>
+          </p:cNvPicPr>
+          <p:nvPr/>
+        </p:nvPicPr>
+        <p:blipFill>
+          <a:blip r:embed="rId2">
+            <a:extLst>
+              <a:ext uri="{28A0092B-C50C-407E-A947-70E740481C1C}">
+                <a14:useLocalDpi xmlns:a14="http://schemas.microsoft.com/office/drawing/2010/main" val="0"/>
+              </a:ext>
+            </a:extLst>
+          </a:blip>
+          <a:stretch>
+            <a:fillRect/>
+          </a:stretch>
+        </p:blipFill>
+        <p:spPr>
+          <a:xfrm>
+            <a:off x="1398983" y="900693"/>
+            <a:ext cx="8295970" cy="4449712"/>
+          </a:xfrm>
+          <a:prstGeom prst="rect">
+            <a:avLst/>
+          </a:prstGeom>
+        </p:spPr>
+      </p:pic>
+      <p:pic>
+        <p:nvPicPr>
+          <p:cNvPr id="9" name="그림 8">
+            <a:extLst>
+              <a:ext uri="{FF2B5EF4-FFF2-40B4-BE49-F238E27FC236}">
+                <a16:creationId xmlns:a16="http://schemas.microsoft.com/office/drawing/2014/main" id="{D94B263E-0FDD-482F-ACD0-4C8C2E6F0A5A}"/>
+              </a:ext>
+            </a:extLst>
+          </p:cNvPr>
+          <p:cNvPicPr>
+            <a:picLocks noChangeAspect="1"/>
+          </p:cNvPicPr>
+          <p:nvPr/>
+        </p:nvPicPr>
+        <p:blipFill rotWithShape="1">
+          <a:blip r:embed="rId3">
+            <a:extLst>
+              <a:ext uri="{28A0092B-C50C-407E-A947-70E740481C1C}">
+                <a14:useLocalDpi xmlns:a14="http://schemas.microsoft.com/office/drawing/2010/main" val="0"/>
+              </a:ext>
+            </a:extLst>
+          </a:blip>
+          <a:srcRect l="26730" t="63501" r="54577" b="30116"/>
+          <a:stretch/>
+        </p:blipFill>
+        <p:spPr>
+          <a:xfrm>
+            <a:off x="3647236" y="3763149"/>
+            <a:ext cx="1550775" cy="284031"/>
+          </a:xfrm>
+          <a:prstGeom prst="rect">
+            <a:avLst/>
+          </a:prstGeom>
+        </p:spPr>
+      </p:pic>
+      <p:pic>
+        <p:nvPicPr>
+          <p:cNvPr id="10" name="그림 9">
+            <a:extLst>
+              <a:ext uri="{FF2B5EF4-FFF2-40B4-BE49-F238E27FC236}">
+                <a16:creationId xmlns:a16="http://schemas.microsoft.com/office/drawing/2014/main" id="{7DCDD34B-71D2-42D2-AB33-AF8E7BB7C3AB}"/>
+              </a:ext>
+            </a:extLst>
+          </p:cNvPr>
+          <p:cNvPicPr>
+            <a:picLocks noChangeAspect="1"/>
+          </p:cNvPicPr>
+          <p:nvPr/>
+        </p:nvPicPr>
+        <p:blipFill rotWithShape="1">
+          <a:blip r:embed="rId3">
+            <a:extLst>
+              <a:ext uri="{28A0092B-C50C-407E-A947-70E740481C1C}">
+                <a14:useLocalDpi xmlns:a14="http://schemas.microsoft.com/office/drawing/2010/main" val="0"/>
+              </a:ext>
+            </a:extLst>
+          </a:blip>
+          <a:srcRect l="50000" t="63052" r="30115" b="30565"/>
+          <a:stretch/>
+        </p:blipFill>
+        <p:spPr>
+          <a:xfrm>
+            <a:off x="5612901" y="3755464"/>
+            <a:ext cx="1649628" cy="284031"/>
+          </a:xfrm>
+          <a:prstGeom prst="rect">
+            <a:avLst/>
+          </a:prstGeom>
+        </p:spPr>
+      </p:pic>
+    </p:spTree>
+    <p:extLst>
+      <p:ext uri="{BB962C8B-B14F-4D97-AF65-F5344CB8AC3E}">
+        <p14:creationId xmlns:p14="http://schemas.microsoft.com/office/powerpoint/2010/main" val="4151851604"/>
+      </p:ext>
+    </p:extLst>
+  </p:cSld>
+  <p:clrMapOvr>
+    <a:masterClrMapping/>
+  </p:clrMapOvr>
+</p:sld>
+</file>
+
+<file path=ppt/slides/slide16.xml><?xml version="1.0" encoding="utf-8"?>
+<p:sld xmlns:a="http://schemas.openxmlformats.org/drawingml/2006/main" xmlns:r="http://schemas.openxmlformats.org/officeDocument/2006/relationships" xmlns:p="http://schemas.openxmlformats.org/presentationml/2006/main">
+  <p:cSld>
+    <p:spTree>
+      <p:nvGrpSpPr>
+        <p:cNvPr id="1" name=""/>
+        <p:cNvGrpSpPr/>
+        <p:nvPr/>
+      </p:nvGrpSpPr>
+      <p:grpSpPr>
+        <a:xfrm>
+          <a:off x="0" y="0"/>
+          <a:ext cx="0" cy="0"/>
+          <a:chOff x="0" y="0"/>
+          <a:chExt cx="0" cy="0"/>
+        </a:xfrm>
+      </p:grpSpPr>
+      <p:pic>
+        <p:nvPicPr>
+          <p:cNvPr id="7" name="그림 6">
+            <a:extLst>
+              <a:ext uri="{FF2B5EF4-FFF2-40B4-BE49-F238E27FC236}">
+                <a16:creationId xmlns:a16="http://schemas.microsoft.com/office/drawing/2014/main" id="{13BE5504-0EBB-44E5-8764-44C50732A760}"/>
+              </a:ext>
+            </a:extLst>
+          </p:cNvPr>
+          <p:cNvPicPr>
+            <a:picLocks noChangeAspect="1"/>
+          </p:cNvPicPr>
+          <p:nvPr/>
+        </p:nvPicPr>
+        <p:blipFill rotWithShape="1">
+          <a:blip r:embed="rId2">
+            <a:extLst>
+              <a:ext uri="{28A0092B-C50C-407E-A947-70E740481C1C}">
+                <a14:useLocalDpi xmlns:a14="http://schemas.microsoft.com/office/drawing/2010/main" val="0"/>
+              </a:ext>
+            </a:extLst>
+          </a:blip>
+          <a:srcRect r="34812" b="17579"/>
+          <a:stretch/>
+        </p:blipFill>
+        <p:spPr>
+          <a:xfrm>
+            <a:off x="5924390" y="1818867"/>
+            <a:ext cx="5407989" cy="3667533"/>
+          </a:xfrm>
+          <a:prstGeom prst="rect">
+            <a:avLst/>
+          </a:prstGeom>
+        </p:spPr>
+      </p:pic>
+      <p:pic>
+        <p:nvPicPr>
+          <p:cNvPr id="11" name="그림 10">
+            <a:extLst>
+              <a:ext uri="{FF2B5EF4-FFF2-40B4-BE49-F238E27FC236}">
+                <a16:creationId xmlns:a16="http://schemas.microsoft.com/office/drawing/2014/main" id="{4F0E33A3-E361-4D17-8BD7-A5BD477B17D9}"/>
+              </a:ext>
+            </a:extLst>
+          </p:cNvPr>
+          <p:cNvPicPr>
+            <a:picLocks noChangeAspect="1"/>
+          </p:cNvPicPr>
+          <p:nvPr/>
+        </p:nvPicPr>
+        <p:blipFill rotWithShape="1">
+          <a:blip r:embed="rId3">
+            <a:extLst>
+              <a:ext uri="{28A0092B-C50C-407E-A947-70E740481C1C}">
+                <a14:useLocalDpi xmlns:a14="http://schemas.microsoft.com/office/drawing/2010/main" val="0"/>
+              </a:ext>
+            </a:extLst>
+          </a:blip>
+          <a:srcRect r="22851" b="17579"/>
+          <a:stretch/>
+        </p:blipFill>
+        <p:spPr>
+          <a:xfrm>
+            <a:off x="516401" y="1818866"/>
+            <a:ext cx="5407989" cy="3667533"/>
+          </a:xfrm>
+          <a:prstGeom prst="rect">
+            <a:avLst/>
+          </a:prstGeom>
+        </p:spPr>
+      </p:pic>
+      <p:pic>
+        <p:nvPicPr>
+          <p:cNvPr id="13" name="그림 12">
+            <a:extLst>
+              <a:ext uri="{FF2B5EF4-FFF2-40B4-BE49-F238E27FC236}">
+                <a16:creationId xmlns:a16="http://schemas.microsoft.com/office/drawing/2014/main" id="{77E938BF-1AD2-4352-BA99-B73EB5937BCA}"/>
+              </a:ext>
+            </a:extLst>
+          </p:cNvPr>
+          <p:cNvPicPr>
+            <a:picLocks noChangeAspect="1"/>
+          </p:cNvPicPr>
+          <p:nvPr/>
+        </p:nvPicPr>
+        <p:blipFill rotWithShape="1">
+          <a:blip r:embed="rId4">
+            <a:extLst>
+              <a:ext uri="{28A0092B-C50C-407E-A947-70E740481C1C}">
+                <a14:useLocalDpi xmlns:a14="http://schemas.microsoft.com/office/drawing/2010/main" val="0"/>
+              </a:ext>
+            </a:extLst>
+          </a:blip>
+          <a:srcRect l="26730" t="63501" r="54577" b="30116"/>
+          <a:stretch/>
+        </p:blipFill>
+        <p:spPr>
+          <a:xfrm>
+            <a:off x="7235680" y="4691238"/>
+            <a:ext cx="1550775" cy="284031"/>
+          </a:xfrm>
+          <a:prstGeom prst="rect">
+            <a:avLst/>
+          </a:prstGeom>
+        </p:spPr>
+      </p:pic>
+      <p:pic>
+        <p:nvPicPr>
+          <p:cNvPr id="14" name="그림 13">
+            <a:extLst>
+              <a:ext uri="{FF2B5EF4-FFF2-40B4-BE49-F238E27FC236}">
+                <a16:creationId xmlns:a16="http://schemas.microsoft.com/office/drawing/2014/main" id="{C07E908B-F377-4FAD-A78A-00615725EC30}"/>
+              </a:ext>
+            </a:extLst>
+          </p:cNvPr>
+          <p:cNvPicPr>
+            <a:picLocks noChangeAspect="1"/>
+          </p:cNvPicPr>
+          <p:nvPr/>
+        </p:nvPicPr>
+        <p:blipFill rotWithShape="1">
+          <a:blip r:embed="rId4">
+            <a:extLst>
+              <a:ext uri="{28A0092B-C50C-407E-A947-70E740481C1C}">
+                <a14:useLocalDpi xmlns:a14="http://schemas.microsoft.com/office/drawing/2010/main" val="0"/>
+              </a:ext>
+            </a:extLst>
+          </a:blip>
+          <a:srcRect l="50000" t="63052" r="30115" b="30565"/>
+          <a:stretch/>
+        </p:blipFill>
+        <p:spPr>
+          <a:xfrm>
+            <a:off x="9178293" y="4675869"/>
+            <a:ext cx="1649628" cy="284031"/>
+          </a:xfrm>
+          <a:prstGeom prst="rect">
+            <a:avLst/>
+          </a:prstGeom>
+        </p:spPr>
+      </p:pic>
+    </p:spTree>
+    <p:extLst>
+      <p:ext uri="{BB962C8B-B14F-4D97-AF65-F5344CB8AC3E}">
+        <p14:creationId xmlns:p14="http://schemas.microsoft.com/office/powerpoint/2010/main" val="223488852"/>
+      </p:ext>
+    </p:extLst>
+  </p:cSld>
+  <p:clrMapOvr>
+    <a:masterClrMapping/>
+  </p:clrMapOvr>
+</p:sld>
+</file>
+
+<file path=ppt/slides/slide17.xml><?xml version="1.0" encoding="utf-8"?>
+<p:sld xmlns:a="http://schemas.openxmlformats.org/drawingml/2006/main" xmlns:r="http://schemas.openxmlformats.org/officeDocument/2006/relationships" xmlns:p="http://schemas.openxmlformats.org/presentationml/2006/main">
+  <p:cSld>
+    <p:spTree>
+      <p:nvGrpSpPr>
+        <p:cNvPr id="1" name=""/>
+        <p:cNvGrpSpPr/>
+        <p:nvPr/>
+      </p:nvGrpSpPr>
+      <p:grpSpPr>
+        <a:xfrm>
+          <a:off x="0" y="0"/>
+          <a:ext cx="0" cy="0"/>
+          <a:chOff x="0" y="0"/>
+          <a:chExt cx="0" cy="0"/>
+        </a:xfrm>
+      </p:grpSpPr>
+      <p:pic>
+        <p:nvPicPr>
+          <p:cNvPr id="4" name="그림 3">
+            <a:extLst>
+              <a:ext uri="{FF2B5EF4-FFF2-40B4-BE49-F238E27FC236}">
+                <a16:creationId xmlns:a16="http://schemas.microsoft.com/office/drawing/2014/main" id="{45E92B8E-FE57-4B9D-B20D-F1841B968445}"/>
+              </a:ext>
+            </a:extLst>
+          </p:cNvPr>
+          <p:cNvPicPr>
+            <a:picLocks noChangeAspect="1"/>
+          </p:cNvPicPr>
+          <p:nvPr/>
+        </p:nvPicPr>
+        <p:blipFill rotWithShape="1">
+          <a:blip r:embed="rId2"/>
+          <a:srcRect t="14983"/>
+          <a:stretch/>
+        </p:blipFill>
+        <p:spPr>
+          <a:xfrm>
+            <a:off x="603854" y="2143844"/>
+            <a:ext cx="10815241" cy="3120210"/>
+          </a:xfrm>
+          <a:prstGeom prst="rect">
+            <a:avLst/>
+          </a:prstGeom>
+        </p:spPr>
+      </p:pic>
+      <p:pic>
+        <p:nvPicPr>
+          <p:cNvPr id="5" name="그림 4">
+            <a:extLst>
+              <a:ext uri="{FF2B5EF4-FFF2-40B4-BE49-F238E27FC236}">
+                <a16:creationId xmlns:a16="http://schemas.microsoft.com/office/drawing/2014/main" id="{29650CB9-3129-480B-9192-2516391823FE}"/>
+              </a:ext>
+            </a:extLst>
+          </p:cNvPr>
+          <p:cNvPicPr>
+            <a:picLocks noChangeAspect="1"/>
+          </p:cNvPicPr>
+          <p:nvPr/>
+        </p:nvPicPr>
+        <p:blipFill rotWithShape="1">
+          <a:blip r:embed="rId2"/>
+          <a:srcRect b="91075"/>
+          <a:stretch/>
+        </p:blipFill>
+        <p:spPr>
+          <a:xfrm>
+            <a:off x="603855" y="1816289"/>
+            <a:ext cx="10815241" cy="327555"/>
+          </a:xfrm>
+          <a:prstGeom prst="rect">
+            <a:avLst/>
+          </a:prstGeom>
+        </p:spPr>
+      </p:pic>
+    </p:spTree>
+    <p:extLst>
+      <p:ext uri="{BB962C8B-B14F-4D97-AF65-F5344CB8AC3E}">
+        <p14:creationId xmlns:p14="http://schemas.microsoft.com/office/powerpoint/2010/main" val="1529943446"/>
       </p:ext>
     </p:extLst>
   </p:cSld>

--- a/프레젠테이션12.pptx
+++ b/프레젠테이션12.pptx
@@ -22,6 +22,9 @@
     <p:sldId id="270" r:id="rId16"/>
     <p:sldId id="271" r:id="rId17"/>
     <p:sldId id="272" r:id="rId18"/>
+    <p:sldId id="273" r:id="rId19"/>
+    <p:sldId id="275" r:id="rId20"/>
+    <p:sldId id="274" r:id="rId21"/>
   </p:sldIdLst>
   <p:sldSz cx="12192000" cy="6858000"/>
   <p:notesSz cx="6858000" cy="9144000"/>
@@ -275,7 +278,7 @@
           <a:p>
             <a:fld id="{A9B323CC-91F9-4676-9123-0A1E04F7520C}" type="datetimeFigureOut">
               <a:rPr lang="ko-KR" altLang="en-US" smtClean="0"/>
-              <a:t>2026-06-22</a:t>
+              <a:t>2026-06-23</a:t>
             </a:fld>
             <a:endParaRPr lang="ko-KR" altLang="en-US"/>
           </a:p>
@@ -473,7 +476,7 @@
           <a:p>
             <a:fld id="{A9B323CC-91F9-4676-9123-0A1E04F7520C}" type="datetimeFigureOut">
               <a:rPr lang="ko-KR" altLang="en-US" smtClean="0"/>
-              <a:t>2026-06-22</a:t>
+              <a:t>2026-06-23</a:t>
             </a:fld>
             <a:endParaRPr lang="ko-KR" altLang="en-US"/>
           </a:p>
@@ -681,7 +684,7 @@
           <a:p>
             <a:fld id="{A9B323CC-91F9-4676-9123-0A1E04F7520C}" type="datetimeFigureOut">
               <a:rPr lang="ko-KR" altLang="en-US" smtClean="0"/>
-              <a:t>2026-06-22</a:t>
+              <a:t>2026-06-23</a:t>
             </a:fld>
             <a:endParaRPr lang="ko-KR" altLang="en-US"/>
           </a:p>
@@ -879,7 +882,7 @@
           <a:p>
             <a:fld id="{A9B323CC-91F9-4676-9123-0A1E04F7520C}" type="datetimeFigureOut">
               <a:rPr lang="ko-KR" altLang="en-US" smtClean="0"/>
-              <a:t>2026-06-22</a:t>
+              <a:t>2026-06-23</a:t>
             </a:fld>
             <a:endParaRPr lang="ko-KR" altLang="en-US"/>
           </a:p>
@@ -1154,7 +1157,7 @@
           <a:p>
             <a:fld id="{A9B323CC-91F9-4676-9123-0A1E04F7520C}" type="datetimeFigureOut">
               <a:rPr lang="ko-KR" altLang="en-US" smtClean="0"/>
-              <a:t>2026-06-22</a:t>
+              <a:t>2026-06-23</a:t>
             </a:fld>
             <a:endParaRPr lang="ko-KR" altLang="en-US"/>
           </a:p>
@@ -1419,7 +1422,7 @@
           <a:p>
             <a:fld id="{A9B323CC-91F9-4676-9123-0A1E04F7520C}" type="datetimeFigureOut">
               <a:rPr lang="ko-KR" altLang="en-US" smtClean="0"/>
-              <a:t>2026-06-22</a:t>
+              <a:t>2026-06-23</a:t>
             </a:fld>
             <a:endParaRPr lang="ko-KR" altLang="en-US"/>
           </a:p>
@@ -1831,7 +1834,7 @@
           <a:p>
             <a:fld id="{A9B323CC-91F9-4676-9123-0A1E04F7520C}" type="datetimeFigureOut">
               <a:rPr lang="ko-KR" altLang="en-US" smtClean="0"/>
-              <a:t>2026-06-22</a:t>
+              <a:t>2026-06-23</a:t>
             </a:fld>
             <a:endParaRPr lang="ko-KR" altLang="en-US"/>
           </a:p>
@@ -1972,7 +1975,7 @@
           <a:p>
             <a:fld id="{A9B323CC-91F9-4676-9123-0A1E04F7520C}" type="datetimeFigureOut">
               <a:rPr lang="ko-KR" altLang="en-US" smtClean="0"/>
-              <a:t>2026-06-22</a:t>
+              <a:t>2026-06-23</a:t>
             </a:fld>
             <a:endParaRPr lang="ko-KR" altLang="en-US"/>
           </a:p>
@@ -2085,7 +2088,7 @@
           <a:p>
             <a:fld id="{A9B323CC-91F9-4676-9123-0A1E04F7520C}" type="datetimeFigureOut">
               <a:rPr lang="ko-KR" altLang="en-US" smtClean="0"/>
-              <a:t>2026-06-22</a:t>
+              <a:t>2026-06-23</a:t>
             </a:fld>
             <a:endParaRPr lang="ko-KR" altLang="en-US"/>
           </a:p>
@@ -2396,7 +2399,7 @@
           <a:p>
             <a:fld id="{A9B323CC-91F9-4676-9123-0A1E04F7520C}" type="datetimeFigureOut">
               <a:rPr lang="ko-KR" altLang="en-US" smtClean="0"/>
-              <a:t>2026-06-22</a:t>
+              <a:t>2026-06-23</a:t>
             </a:fld>
             <a:endParaRPr lang="ko-KR" altLang="en-US"/>
           </a:p>
@@ -2684,7 +2687,7 @@
           <a:p>
             <a:fld id="{A9B323CC-91F9-4676-9123-0A1E04F7520C}" type="datetimeFigureOut">
               <a:rPr lang="ko-KR" altLang="en-US" smtClean="0"/>
-              <a:t>2026-06-22</a:t>
+              <a:t>2026-06-23</a:t>
             </a:fld>
             <a:endParaRPr lang="ko-KR" altLang="en-US"/>
           </a:p>
@@ -2925,7 +2928,7 @@
           <a:p>
             <a:fld id="{A9B323CC-91F9-4676-9123-0A1E04F7520C}" type="datetimeFigureOut">
               <a:rPr lang="ko-KR" altLang="en-US" smtClean="0"/>
-              <a:t>2026-06-22</a:t>
+              <a:t>2026-06-23</a:t>
             </a:fld>
             <a:endParaRPr lang="ko-KR" altLang="en-US"/>
           </a:p>
@@ -4678,10 +4681,10 @@
       </p:pic>
       <p:pic>
         <p:nvPicPr>
-          <p:cNvPr id="11" name="그림 10">
-            <a:extLst>
-              <a:ext uri="{FF2B5EF4-FFF2-40B4-BE49-F238E27FC236}">
-                <a16:creationId xmlns:a16="http://schemas.microsoft.com/office/drawing/2014/main" id="{4F0E33A3-E361-4D17-8BD7-A5BD477B17D9}"/>
+          <p:cNvPr id="13" name="그림 12">
+            <a:extLst>
+              <a:ext uri="{FF2B5EF4-FFF2-40B4-BE49-F238E27FC236}">
+                <a16:creationId xmlns:a16="http://schemas.microsoft.com/office/drawing/2014/main" id="{77E938BF-1AD2-4352-BA99-B73EB5937BCA}"/>
               </a:ext>
             </a:extLst>
           </p:cNvPr>
@@ -4698,13 +4701,13 @@
               </a:ext>
             </a:extLst>
           </a:blip>
-          <a:srcRect r="22851" b="17579"/>
+          <a:srcRect l="26730" t="63501" r="54577" b="30116"/>
           <a:stretch/>
         </p:blipFill>
         <p:spPr>
           <a:xfrm>
-            <a:off x="516401" y="1818866"/>
-            <a:ext cx="5407989" cy="3667533"/>
+            <a:off x="7235680" y="4691238"/>
+            <a:ext cx="1550775" cy="284031"/>
           </a:xfrm>
           <a:prstGeom prst="rect">
             <a:avLst/>
@@ -4713,10 +4716,45 @@
       </p:pic>
       <p:pic>
         <p:nvPicPr>
-          <p:cNvPr id="13" name="그림 12">
-            <a:extLst>
-              <a:ext uri="{FF2B5EF4-FFF2-40B4-BE49-F238E27FC236}">
-                <a16:creationId xmlns:a16="http://schemas.microsoft.com/office/drawing/2014/main" id="{77E938BF-1AD2-4352-BA99-B73EB5937BCA}"/>
+          <p:cNvPr id="14" name="그림 13">
+            <a:extLst>
+              <a:ext uri="{FF2B5EF4-FFF2-40B4-BE49-F238E27FC236}">
+                <a16:creationId xmlns:a16="http://schemas.microsoft.com/office/drawing/2014/main" id="{C07E908B-F377-4FAD-A78A-00615725EC30}"/>
+              </a:ext>
+            </a:extLst>
+          </p:cNvPr>
+          <p:cNvPicPr>
+            <a:picLocks noChangeAspect="1"/>
+          </p:cNvPicPr>
+          <p:nvPr/>
+        </p:nvPicPr>
+        <p:blipFill rotWithShape="1">
+          <a:blip r:embed="rId3">
+            <a:extLst>
+              <a:ext uri="{28A0092B-C50C-407E-A947-70E740481C1C}">
+                <a14:useLocalDpi xmlns:a14="http://schemas.microsoft.com/office/drawing/2010/main" val="0"/>
+              </a:ext>
+            </a:extLst>
+          </a:blip>
+          <a:srcRect l="50000" t="63052" r="30115" b="30565"/>
+          <a:stretch/>
+        </p:blipFill>
+        <p:spPr>
+          <a:xfrm>
+            <a:off x="9178293" y="4675869"/>
+            <a:ext cx="1649628" cy="284031"/>
+          </a:xfrm>
+          <a:prstGeom prst="rect">
+            <a:avLst/>
+          </a:prstGeom>
+        </p:spPr>
+      </p:pic>
+      <p:pic>
+        <p:nvPicPr>
+          <p:cNvPr id="6" name="그림 5">
+            <a:extLst>
+              <a:ext uri="{FF2B5EF4-FFF2-40B4-BE49-F238E27FC236}">
+                <a16:creationId xmlns:a16="http://schemas.microsoft.com/office/drawing/2014/main" id="{0E03842E-E235-42D7-9E3A-8AB4415201A0}"/>
               </a:ext>
             </a:extLst>
           </p:cNvPr>
@@ -4733,13 +4771,13 @@
               </a:ext>
             </a:extLst>
           </a:blip>
-          <a:srcRect l="26730" t="63501" r="54577" b="30116"/>
+          <a:srcRect t="11912" r="22334" b="16130"/>
           <a:stretch/>
         </p:blipFill>
         <p:spPr>
           <a:xfrm>
-            <a:off x="7235680" y="4691238"/>
-            <a:ext cx="1550775" cy="284031"/>
+            <a:off x="314275" y="2087745"/>
+            <a:ext cx="5778733" cy="3398655"/>
           </a:xfrm>
           <a:prstGeom prst="rect">
             <a:avLst/>
@@ -4748,10 +4786,10 @@
       </p:pic>
       <p:pic>
         <p:nvPicPr>
-          <p:cNvPr id="14" name="그림 13">
-            <a:extLst>
-              <a:ext uri="{FF2B5EF4-FFF2-40B4-BE49-F238E27FC236}">
-                <a16:creationId xmlns:a16="http://schemas.microsoft.com/office/drawing/2014/main" id="{C07E908B-F377-4FAD-A78A-00615725EC30}"/>
+          <p:cNvPr id="8" name="그림 7">
+            <a:extLst>
+              <a:ext uri="{FF2B5EF4-FFF2-40B4-BE49-F238E27FC236}">
+                <a16:creationId xmlns:a16="http://schemas.microsoft.com/office/drawing/2014/main" id="{57B0ADB8-3190-464C-BF34-627CF194D698}"/>
               </a:ext>
             </a:extLst>
           </p:cNvPr>
@@ -4768,13 +4806,13 @@
               </a:ext>
             </a:extLst>
           </a:blip>
-          <a:srcRect l="50000" t="63052" r="30115" b="30565"/>
+          <a:srcRect r="22334" b="92686"/>
           <a:stretch/>
         </p:blipFill>
         <p:spPr>
           <a:xfrm>
-            <a:off x="9178293" y="4675869"/>
-            <a:ext cx="1649628" cy="284031"/>
+            <a:off x="314275" y="1821370"/>
+            <a:ext cx="5778733" cy="345456"/>
           </a:xfrm>
           <a:prstGeom prst="rect">
             <a:avLst/>
@@ -4832,7 +4870,7 @@
         </p:blipFill>
         <p:spPr>
           <a:xfrm>
-            <a:off x="603854" y="2143844"/>
+            <a:off x="984180" y="2143844"/>
             <a:ext cx="10815241" cy="3120210"/>
           </a:xfrm>
           <a:prstGeom prst="rect">
@@ -4869,10 +4907,171 @@
           </a:prstGeom>
         </p:spPr>
       </p:pic>
+      <p:pic>
+        <p:nvPicPr>
+          <p:cNvPr id="3" name="그림 2">
+            <a:extLst>
+              <a:ext uri="{FF2B5EF4-FFF2-40B4-BE49-F238E27FC236}">
+                <a16:creationId xmlns:a16="http://schemas.microsoft.com/office/drawing/2014/main" id="{DF8BB217-0DC2-49EC-88E6-CEE2538B6893}"/>
+              </a:ext>
+            </a:extLst>
+          </p:cNvPr>
+          <p:cNvPicPr>
+            <a:picLocks noChangeAspect="1"/>
+          </p:cNvPicPr>
+          <p:nvPr/>
+        </p:nvPicPr>
+        <p:blipFill rotWithShape="1">
+          <a:blip r:embed="rId3">
+            <a:extLst>
+              <a:ext uri="{28A0092B-C50C-407E-A947-70E740481C1C}">
+                <a14:useLocalDpi xmlns:a14="http://schemas.microsoft.com/office/drawing/2010/main" val="0"/>
+              </a:ext>
+            </a:extLst>
+          </a:blip>
+          <a:srcRect r="22334" b="16130"/>
+          <a:stretch/>
+        </p:blipFill>
+        <p:spPr>
+          <a:xfrm>
+            <a:off x="2421157" y="2231832"/>
+            <a:ext cx="5444301" cy="3731998"/>
+          </a:xfrm>
+          <a:prstGeom prst="rect">
+            <a:avLst/>
+          </a:prstGeom>
+        </p:spPr>
+      </p:pic>
     </p:spTree>
     <p:extLst>
       <p:ext uri="{BB962C8B-B14F-4D97-AF65-F5344CB8AC3E}">
         <p14:creationId xmlns:p14="http://schemas.microsoft.com/office/powerpoint/2010/main" val="1529943446"/>
+      </p:ext>
+    </p:extLst>
+  </p:cSld>
+  <p:clrMapOvr>
+    <a:masterClrMapping/>
+  </p:clrMapOvr>
+</p:sld>
+</file>
+
+<file path=ppt/slides/slide18.xml><?xml version="1.0" encoding="utf-8"?>
+<p:sld xmlns:a="http://schemas.openxmlformats.org/drawingml/2006/main" xmlns:r="http://schemas.openxmlformats.org/officeDocument/2006/relationships" xmlns:p="http://schemas.openxmlformats.org/presentationml/2006/main">
+  <p:cSld>
+    <p:spTree>
+      <p:nvGrpSpPr>
+        <p:cNvPr id="1" name=""/>
+        <p:cNvGrpSpPr/>
+        <p:nvPr/>
+      </p:nvGrpSpPr>
+      <p:grpSpPr>
+        <a:xfrm>
+          <a:off x="0" y="0"/>
+          <a:ext cx="0" cy="0"/>
+          <a:chOff x="0" y="0"/>
+          <a:chExt cx="0" cy="0"/>
+        </a:xfrm>
+      </p:grpSpPr>
+      <p:pic>
+        <p:nvPicPr>
+          <p:cNvPr id="5" name="그림 4">
+            <a:extLst>
+              <a:ext uri="{FF2B5EF4-FFF2-40B4-BE49-F238E27FC236}">
+                <a16:creationId xmlns:a16="http://schemas.microsoft.com/office/drawing/2014/main" id="{66D98C87-CCEE-4C81-8D4A-B48C7E5F2607}"/>
+              </a:ext>
+            </a:extLst>
+          </p:cNvPr>
+          <p:cNvPicPr>
+            <a:picLocks noChangeAspect="1"/>
+          </p:cNvPicPr>
+          <p:nvPr/>
+        </p:nvPicPr>
+        <p:blipFill>
+          <a:blip r:embed="rId2"/>
+          <a:stretch>
+            <a:fillRect/>
+          </a:stretch>
+        </p:blipFill>
+        <p:spPr>
+          <a:xfrm>
+            <a:off x="302190" y="801038"/>
+            <a:ext cx="11587620" cy="5255923"/>
+          </a:xfrm>
+          <a:prstGeom prst="rect">
+            <a:avLst/>
+          </a:prstGeom>
+        </p:spPr>
+      </p:pic>
+    </p:spTree>
+    <p:extLst>
+      <p:ext uri="{BB962C8B-B14F-4D97-AF65-F5344CB8AC3E}">
+        <p14:creationId xmlns:p14="http://schemas.microsoft.com/office/powerpoint/2010/main" val="1336521525"/>
+      </p:ext>
+    </p:extLst>
+  </p:cSld>
+  <p:clrMapOvr>
+    <a:masterClrMapping/>
+  </p:clrMapOvr>
+</p:sld>
+</file>
+
+<file path=ppt/slides/slide19.xml><?xml version="1.0" encoding="utf-8"?>
+<p:sld xmlns:a="http://schemas.openxmlformats.org/drawingml/2006/main" xmlns:r="http://schemas.openxmlformats.org/officeDocument/2006/relationships" xmlns:p="http://schemas.openxmlformats.org/presentationml/2006/main">
+  <p:cSld>
+    <p:spTree>
+      <p:nvGrpSpPr>
+        <p:cNvPr id="1" name=""/>
+        <p:cNvGrpSpPr/>
+        <p:nvPr/>
+      </p:nvGrpSpPr>
+      <p:grpSpPr>
+        <a:xfrm>
+          <a:off x="0" y="0"/>
+          <a:ext cx="0" cy="0"/>
+          <a:chOff x="0" y="0"/>
+          <a:chExt cx="0" cy="0"/>
+        </a:xfrm>
+      </p:grpSpPr>
+      <p:pic>
+        <p:nvPicPr>
+          <p:cNvPr id="5" name="그림 4">
+            <a:extLst>
+              <a:ext uri="{FF2B5EF4-FFF2-40B4-BE49-F238E27FC236}">
+                <a16:creationId xmlns:a16="http://schemas.microsoft.com/office/drawing/2014/main" id="{2198BB24-2C39-40F8-AD87-5EFC7F0D782F}"/>
+              </a:ext>
+            </a:extLst>
+          </p:cNvPr>
+          <p:cNvPicPr>
+            <a:picLocks noChangeAspect="1"/>
+          </p:cNvPicPr>
+          <p:nvPr/>
+        </p:nvPicPr>
+        <p:blipFill>
+          <a:blip r:embed="rId2">
+            <a:extLst>
+              <a:ext uri="{28A0092B-C50C-407E-A947-70E740481C1C}">
+                <a14:useLocalDpi xmlns:a14="http://schemas.microsoft.com/office/drawing/2010/main" val="0"/>
+              </a:ext>
+            </a:extLst>
+          </a:blip>
+          <a:stretch>
+            <a:fillRect/>
+          </a:stretch>
+        </p:blipFill>
+        <p:spPr>
+          <a:xfrm>
+            <a:off x="720151" y="1262377"/>
+            <a:ext cx="6851337" cy="3718252"/>
+          </a:xfrm>
+          <a:prstGeom prst="rect">
+            <a:avLst/>
+          </a:prstGeom>
+        </p:spPr>
+      </p:pic>
+    </p:spTree>
+    <p:extLst>
+      <p:ext uri="{BB962C8B-B14F-4D97-AF65-F5344CB8AC3E}">
+        <p14:creationId xmlns:p14="http://schemas.microsoft.com/office/powerpoint/2010/main" val="2937633362"/>
       </p:ext>
     </p:extLst>
   </p:cSld>
@@ -5616,6 +5815,106 @@
 </p:sld>
 </file>
 
+<file path=ppt/slides/slide20.xml><?xml version="1.0" encoding="utf-8"?>
+<p:sld xmlns:a="http://schemas.openxmlformats.org/drawingml/2006/main" xmlns:r="http://schemas.openxmlformats.org/officeDocument/2006/relationships" xmlns:p="http://schemas.openxmlformats.org/presentationml/2006/main">
+  <p:cSld>
+    <p:spTree>
+      <p:nvGrpSpPr>
+        <p:cNvPr id="1" name=""/>
+        <p:cNvGrpSpPr/>
+        <p:nvPr/>
+      </p:nvGrpSpPr>
+      <p:grpSpPr>
+        <a:xfrm>
+          <a:off x="0" y="0"/>
+          <a:ext cx="0" cy="0"/>
+          <a:chOff x="0" y="0"/>
+          <a:chExt cx="0" cy="0"/>
+        </a:xfrm>
+      </p:grpSpPr>
+      <p:pic>
+        <p:nvPicPr>
+          <p:cNvPr id="5" name="그림 4">
+            <a:extLst>
+              <a:ext uri="{FF2B5EF4-FFF2-40B4-BE49-F238E27FC236}">
+                <a16:creationId xmlns:a16="http://schemas.microsoft.com/office/drawing/2014/main" id="{2B146A7A-5E9A-4AC6-AE8D-25090A335E2D}"/>
+              </a:ext>
+            </a:extLst>
+          </p:cNvPr>
+          <p:cNvPicPr>
+            <a:picLocks noChangeAspect="1"/>
+          </p:cNvPicPr>
+          <p:nvPr/>
+        </p:nvPicPr>
+        <p:blipFill rotWithShape="1">
+          <a:blip r:embed="rId2">
+            <a:extLst>
+              <a:ext uri="{28A0092B-C50C-407E-A947-70E740481C1C}">
+                <a14:useLocalDpi xmlns:a14="http://schemas.microsoft.com/office/drawing/2010/main" val="0"/>
+              </a:ext>
+            </a:extLst>
+          </a:blip>
+          <a:srcRect b="89387"/>
+          <a:stretch/>
+        </p:blipFill>
+        <p:spPr>
+          <a:xfrm>
+            <a:off x="930585" y="1236686"/>
+            <a:ext cx="10973751" cy="446458"/>
+          </a:xfrm>
+          <a:prstGeom prst="rect">
+            <a:avLst/>
+          </a:prstGeom>
+        </p:spPr>
+      </p:pic>
+      <p:pic>
+        <p:nvPicPr>
+          <p:cNvPr id="9" name="그림 8">
+            <a:extLst>
+              <a:ext uri="{FF2B5EF4-FFF2-40B4-BE49-F238E27FC236}">
+                <a16:creationId xmlns:a16="http://schemas.microsoft.com/office/drawing/2014/main" id="{D17D14DC-BCFE-4AE4-B16D-F6A95DC03DEA}"/>
+              </a:ext>
+            </a:extLst>
+          </p:cNvPr>
+          <p:cNvPicPr>
+            <a:picLocks noChangeAspect="1"/>
+          </p:cNvPicPr>
+          <p:nvPr/>
+        </p:nvPicPr>
+        <p:blipFill rotWithShape="1">
+          <a:blip r:embed="rId3">
+            <a:extLst>
+              <a:ext uri="{28A0092B-C50C-407E-A947-70E740481C1C}">
+                <a14:useLocalDpi xmlns:a14="http://schemas.microsoft.com/office/drawing/2010/main" val="0"/>
+              </a:ext>
+            </a:extLst>
+          </a:blip>
+          <a:srcRect t="14653"/>
+          <a:stretch/>
+        </p:blipFill>
+        <p:spPr>
+          <a:xfrm>
+            <a:off x="930585" y="1633893"/>
+            <a:ext cx="10973751" cy="3590214"/>
+          </a:xfrm>
+          <a:prstGeom prst="rect">
+            <a:avLst/>
+          </a:prstGeom>
+        </p:spPr>
+      </p:pic>
+    </p:spTree>
+    <p:extLst>
+      <p:ext uri="{BB962C8B-B14F-4D97-AF65-F5344CB8AC3E}">
+        <p14:creationId xmlns:p14="http://schemas.microsoft.com/office/powerpoint/2010/main" val="2393071070"/>
+      </p:ext>
+    </p:extLst>
+  </p:cSld>
+  <p:clrMapOvr>
+    <a:masterClrMapping/>
+  </p:clrMapOvr>
+</p:sld>
+</file>
+
 <file path=ppt/slides/slide3.xml><?xml version="1.0" encoding="utf-8"?>
 <p:sld xmlns:a="http://schemas.openxmlformats.org/drawingml/2006/main" xmlns:r="http://schemas.openxmlformats.org/officeDocument/2006/relationships" xmlns:p="http://schemas.openxmlformats.org/presentationml/2006/main">
   <p:cSld>
